--- a/тз.pptx
+++ b/тз.pptx
@@ -8,23 +8,23 @@
     <p:notesMasterId r:id="rId19"/>
   </p:notesMasterIdLst>
   <p:sldIdLst>
-    <p:sldId id="272" r:id="rId2"/>
-    <p:sldId id="281" r:id="rId3"/>
-    <p:sldId id="282" r:id="rId4"/>
-    <p:sldId id="260" r:id="rId5"/>
-    <p:sldId id="271" r:id="rId6"/>
-    <p:sldId id="276" r:id="rId7"/>
-    <p:sldId id="283" r:id="rId8"/>
-    <p:sldId id="258" r:id="rId9"/>
-    <p:sldId id="273" r:id="rId10"/>
-    <p:sldId id="274" r:id="rId11"/>
-    <p:sldId id="266" r:id="rId12"/>
-    <p:sldId id="261" r:id="rId13"/>
-    <p:sldId id="269" r:id="rId14"/>
-    <p:sldId id="270" r:id="rId15"/>
-    <p:sldId id="280" r:id="rId16"/>
+    <p:sldId id="284" r:id="rId2"/>
+    <p:sldId id="272" r:id="rId3"/>
+    <p:sldId id="281" r:id="rId4"/>
+    <p:sldId id="282" r:id="rId5"/>
+    <p:sldId id="260" r:id="rId6"/>
+    <p:sldId id="271" r:id="rId7"/>
+    <p:sldId id="276" r:id="rId8"/>
+    <p:sldId id="283" r:id="rId9"/>
+    <p:sldId id="258" r:id="rId10"/>
+    <p:sldId id="273" r:id="rId11"/>
+    <p:sldId id="274" r:id="rId12"/>
+    <p:sldId id="266" r:id="rId13"/>
+    <p:sldId id="261" r:id="rId14"/>
+    <p:sldId id="269" r:id="rId15"/>
+    <p:sldId id="270" r:id="rId16"/>
     <p:sldId id="277" r:id="rId17"/>
-    <p:sldId id="279" r:id="rId18"/>
+    <p:sldId id="280" r:id="rId18"/>
   </p:sldIdLst>
   <p:sldSz cx="12192000" cy="6858000"/>
   <p:notesSz cx="6858000" cy="12192000"/>
@@ -261,7 +261,7 @@
         <p:cNvPr id="1" name="">
           <a:extLst>
             <a:ext uri="{FF2B5EF4-FFF2-40B4-BE49-F238E27FC236}">
-              <a16:creationId xmlns:a16="http://schemas.microsoft.com/office/drawing/2014/main" id="{11D28139-928B-516C-F2B0-687D31EAF89C}"/>
+              <a16:creationId xmlns:a16="http://schemas.microsoft.com/office/drawing/2014/main" id="{1F8D4C18-5F45-60C8-7DF3-0F49F9BE5676}"/>
             </a:ext>
           </a:extLst>
         </p:cNvPr>
@@ -281,7 +281,7 @@
           <p:cNvPr id="2" name="Slide Image Placeholder 1">
             <a:extLst>
               <a:ext uri="{FF2B5EF4-FFF2-40B4-BE49-F238E27FC236}">
-                <a16:creationId xmlns:a16="http://schemas.microsoft.com/office/drawing/2014/main" id="{B8C05F6D-76D1-6002-C12B-57937679E42E}"/>
+                <a16:creationId xmlns:a16="http://schemas.microsoft.com/office/drawing/2014/main" id="{69D23026-4821-EA63-F12B-696823505764}"/>
               </a:ext>
             </a:extLst>
           </p:cNvPr>
@@ -299,7 +299,7 @@
           <p:cNvPr id="3" name="Notes Placeholder 2">
             <a:extLst>
               <a:ext uri="{FF2B5EF4-FFF2-40B4-BE49-F238E27FC236}">
-                <a16:creationId xmlns:a16="http://schemas.microsoft.com/office/drawing/2014/main" id="{F237B622-CE58-2063-6F6B-20823F034722}"/>
+                <a16:creationId xmlns:a16="http://schemas.microsoft.com/office/drawing/2014/main" id="{AD6C95B1-4D4D-E7F4-4D5D-DB44DF572BA4}"/>
               </a:ext>
             </a:extLst>
           </p:cNvPr>
@@ -324,7 +324,7 @@
           <p:cNvPr id="4" name="Slide Number Placeholder 3">
             <a:extLst>
               <a:ext uri="{FF2B5EF4-FFF2-40B4-BE49-F238E27FC236}">
-                <a16:creationId xmlns:a16="http://schemas.microsoft.com/office/drawing/2014/main" id="{87D36C69-53F3-C324-E35C-C263D50400D9}"/>
+                <a16:creationId xmlns:a16="http://schemas.microsoft.com/office/drawing/2014/main" id="{C5579E9C-4274-E0F4-7120-ED8BF0BE4AB0}"/>
               </a:ext>
             </a:extLst>
           </p:cNvPr>
@@ -351,7 +351,7 @@
     </p:spTree>
     <p:extLst>
       <p:ext uri="{BB962C8B-B14F-4D97-AF65-F5344CB8AC3E}">
-        <p14:creationId xmlns:p14="http://schemas.microsoft.com/office/powerpoint/2010/main" val="2508624979"/>
+        <p14:creationId xmlns:p14="http://schemas.microsoft.com/office/powerpoint/2010/main" val="3188049158"/>
       </p:ext>
     </p:extLst>
   </p:cSld>
@@ -362,6 +362,114 @@
 </file>
 
 <file path=ppt/notesSlides/notesSlide10.xml><?xml version="1.0" encoding="utf-8"?>
+<p:notes xmlns:a="http://schemas.openxmlformats.org/drawingml/2006/main" xmlns:r="http://schemas.openxmlformats.org/officeDocument/2006/relationships" xmlns:p="http://schemas.openxmlformats.org/presentationml/2006/main">
+  <p:cSld>
+    <p:spTree>
+      <p:nvGrpSpPr>
+        <p:cNvPr id="1" name="">
+          <a:extLst>
+            <a:ext uri="{FF2B5EF4-FFF2-40B4-BE49-F238E27FC236}">
+              <a16:creationId xmlns:a16="http://schemas.microsoft.com/office/drawing/2014/main" id="{59C393F0-E5B8-CC63-F264-85348BE2BC21}"/>
+            </a:ext>
+          </a:extLst>
+        </p:cNvPr>
+        <p:cNvGrpSpPr/>
+        <p:nvPr/>
+      </p:nvGrpSpPr>
+      <p:grpSpPr>
+        <a:xfrm>
+          <a:off x="0" y="0"/>
+          <a:ext cx="0" cy="0"/>
+          <a:chOff x="0" y="0"/>
+          <a:chExt cx="0" cy="0"/>
+        </a:xfrm>
+      </p:grpSpPr>
+      <p:sp>
+        <p:nvSpPr>
+          <p:cNvPr id="2" name="Slide Image Placeholder 1">
+            <a:extLst>
+              <a:ext uri="{FF2B5EF4-FFF2-40B4-BE49-F238E27FC236}">
+                <a16:creationId xmlns:a16="http://schemas.microsoft.com/office/drawing/2014/main" id="{92E591F0-5A46-372F-8B3E-9DFD07AB5D90}"/>
+              </a:ext>
+            </a:extLst>
+          </p:cNvPr>
+          <p:cNvSpPr>
+            <a:spLocks noGrp="1" noRot="1" noChangeAspect="1"/>
+          </p:cNvSpPr>
+          <p:nvPr>
+            <p:ph type="sldImg"/>
+          </p:nvPr>
+        </p:nvSpPr>
+        <p:spPr/>
+      </p:sp>
+      <p:sp>
+        <p:nvSpPr>
+          <p:cNvPr id="3" name="Notes Placeholder 2">
+            <a:extLst>
+              <a:ext uri="{FF2B5EF4-FFF2-40B4-BE49-F238E27FC236}">
+                <a16:creationId xmlns:a16="http://schemas.microsoft.com/office/drawing/2014/main" id="{F450C544-5180-D698-7F37-1CD1DBCE7B71}"/>
+              </a:ext>
+            </a:extLst>
+          </p:cNvPr>
+          <p:cNvSpPr>
+            <a:spLocks noGrp="1"/>
+          </p:cNvSpPr>
+          <p:nvPr>
+            <p:ph type="body" idx="1"/>
+          </p:nvPr>
+        </p:nvSpPr>
+        <p:spPr/>
+        <p:txBody>
+          <a:bodyPr/>
+          <a:lstStyle/>
+          <a:p>
+            <a:endParaRPr lang="en-US" dirty="0"/>
+          </a:p>
+        </p:txBody>
+      </p:sp>
+      <p:sp>
+        <p:nvSpPr>
+          <p:cNvPr id="4" name="Slide Number Placeholder 3">
+            <a:extLst>
+              <a:ext uri="{FF2B5EF4-FFF2-40B4-BE49-F238E27FC236}">
+                <a16:creationId xmlns:a16="http://schemas.microsoft.com/office/drawing/2014/main" id="{E62A9FB7-B8FF-08C5-49BC-127FEA34F2E2}"/>
+              </a:ext>
+            </a:extLst>
+          </p:cNvPr>
+          <p:cNvSpPr>
+            <a:spLocks noGrp="1"/>
+          </p:cNvSpPr>
+          <p:nvPr>
+            <p:ph type="sldNum" sz="quarter" idx="10"/>
+          </p:nvPr>
+        </p:nvSpPr>
+        <p:spPr/>
+        <p:txBody>
+          <a:bodyPr/>
+          <a:lstStyle/>
+          <a:p>
+            <a:fld id="{F7021451-1387-4CA6-816F-3879F97B5CBC}" type="slidenum">
+              <a:rPr lang="en-US"/>
+              <a:t>10</a:t>
+            </a:fld>
+            <a:endParaRPr lang="en-US"/>
+          </a:p>
+        </p:txBody>
+      </p:sp>
+    </p:spTree>
+    <p:extLst>
+      <p:ext uri="{BB962C8B-B14F-4D97-AF65-F5344CB8AC3E}">
+        <p14:creationId xmlns:p14="http://schemas.microsoft.com/office/powerpoint/2010/main" val="3507848628"/>
+      </p:ext>
+    </p:extLst>
+  </p:cSld>
+  <p:clrMapOvr>
+    <a:masterClrMapping/>
+  </p:clrMapOvr>
+</p:notes>
+</file>
+
+<file path=ppt/notesSlides/notesSlide11.xml><?xml version="1.0" encoding="utf-8"?>
 <p:notes xmlns:a="http://schemas.openxmlformats.org/drawingml/2006/main" xmlns:r="http://schemas.openxmlformats.org/officeDocument/2006/relationships" xmlns:p="http://schemas.openxmlformats.org/presentationml/2006/main">
   <p:cSld>
     <p:spTree>
@@ -450,7 +558,7 @@
           <a:p>
             <a:fld id="{F7021451-1387-4CA6-816F-3879F97B5CBC}" type="slidenum">
               <a:rPr lang="en-US"/>
-              <a:t>10</a:t>
+              <a:t>11</a:t>
             </a:fld>
             <a:endParaRPr lang="en-US"/>
           </a:p>
@@ -469,7 +577,7 @@
 </p:notes>
 </file>
 
-<file path=ppt/notesSlides/notesSlide11.xml><?xml version="1.0" encoding="utf-8"?>
+<file path=ppt/notesSlides/notesSlide12.xml><?xml version="1.0" encoding="utf-8"?>
 <p:notes xmlns:a="http://schemas.openxmlformats.org/drawingml/2006/main" xmlns:r="http://schemas.openxmlformats.org/officeDocument/2006/relationships" xmlns:p="http://schemas.openxmlformats.org/presentationml/2006/main">
   <p:cSld>
     <p:spTree>
@@ -558,7 +666,7 @@
           <a:p>
             <a:fld id="{F7021451-1387-4CA6-816F-3879F97B5CBC}" type="slidenum">
               <a:rPr lang="en-US"/>
-              <a:t>11</a:t>
+              <a:t>12</a:t>
             </a:fld>
             <a:endParaRPr lang="en-US"/>
           </a:p>
@@ -577,7 +685,7 @@
 </p:notes>
 </file>
 
-<file path=ppt/notesSlides/notesSlide12.xml><?xml version="1.0" encoding="utf-8"?>
+<file path=ppt/notesSlides/notesSlide13.xml><?xml version="1.0" encoding="utf-8"?>
 <p:notes xmlns:a="http://schemas.openxmlformats.org/drawingml/2006/main" xmlns:r="http://schemas.openxmlformats.org/officeDocument/2006/relationships" xmlns:p="http://schemas.openxmlformats.org/presentationml/2006/main">
   <p:cSld>
     <p:spTree>
@@ -642,7 +750,7 @@
           <a:p>
             <a:fld id="{F7021451-1387-4CA6-816F-3879F97B5CBC}" type="slidenum">
               <a:rPr lang="en-US"/>
-              <a:t>12</a:t>
+              <a:t>13</a:t>
             </a:fld>
             <a:endParaRPr lang="en-US"/>
           </a:p>
@@ -661,7 +769,7 @@
 </p:notes>
 </file>
 
-<file path=ppt/notesSlides/notesSlide13.xml><?xml version="1.0" encoding="utf-8"?>
+<file path=ppt/notesSlides/notesSlide14.xml><?xml version="1.0" encoding="utf-8"?>
 <p:notes xmlns:a="http://schemas.openxmlformats.org/drawingml/2006/main" xmlns:r="http://schemas.openxmlformats.org/officeDocument/2006/relationships" xmlns:p="http://schemas.openxmlformats.org/presentationml/2006/main">
   <p:cSld>
     <p:spTree>
@@ -750,7 +858,7 @@
           <a:p>
             <a:fld id="{F7021451-1387-4CA6-816F-3879F97B5CBC}" type="slidenum">
               <a:rPr lang="en-US"/>
-              <a:t>13</a:t>
+              <a:t>14</a:t>
             </a:fld>
             <a:endParaRPr lang="en-US"/>
           </a:p>
@@ -769,7 +877,7 @@
 </p:notes>
 </file>
 
-<file path=ppt/notesSlides/notesSlide14.xml><?xml version="1.0" encoding="utf-8"?>
+<file path=ppt/notesSlides/notesSlide15.xml><?xml version="1.0" encoding="utf-8"?>
 <p:notes xmlns:a="http://schemas.openxmlformats.org/drawingml/2006/main" xmlns:r="http://schemas.openxmlformats.org/officeDocument/2006/relationships" xmlns:p="http://schemas.openxmlformats.org/presentationml/2006/main">
   <p:cSld>
     <p:spTree>
@@ -858,7 +966,7 @@
           <a:p>
             <a:fld id="{F7021451-1387-4CA6-816F-3879F97B5CBC}" type="slidenum">
               <a:rPr lang="en-US"/>
-              <a:t>14</a:t>
+              <a:t>15</a:t>
             </a:fld>
             <a:endParaRPr lang="en-US"/>
           </a:p>
@@ -868,114 +976,6 @@
     <p:extLst>
       <p:ext uri="{BB962C8B-B14F-4D97-AF65-F5344CB8AC3E}">
         <p14:creationId xmlns:p14="http://schemas.microsoft.com/office/powerpoint/2010/main" val="2856416366"/>
-      </p:ext>
-    </p:extLst>
-  </p:cSld>
-  <p:clrMapOvr>
-    <a:masterClrMapping/>
-  </p:clrMapOvr>
-</p:notes>
-</file>
-
-<file path=ppt/notesSlides/notesSlide15.xml><?xml version="1.0" encoding="utf-8"?>
-<p:notes xmlns:a="http://schemas.openxmlformats.org/drawingml/2006/main" xmlns:r="http://schemas.openxmlformats.org/officeDocument/2006/relationships" xmlns:p="http://schemas.openxmlformats.org/presentationml/2006/main">
-  <p:cSld>
-    <p:spTree>
-      <p:nvGrpSpPr>
-        <p:cNvPr id="1" name="">
-          <a:extLst>
-            <a:ext uri="{FF2B5EF4-FFF2-40B4-BE49-F238E27FC236}">
-              <a16:creationId xmlns:a16="http://schemas.microsoft.com/office/drawing/2014/main" id="{63712C30-82C5-71ED-C888-8B7C6D9F5909}"/>
-            </a:ext>
-          </a:extLst>
-        </p:cNvPr>
-        <p:cNvGrpSpPr/>
-        <p:nvPr/>
-      </p:nvGrpSpPr>
-      <p:grpSpPr>
-        <a:xfrm>
-          <a:off x="0" y="0"/>
-          <a:ext cx="0" cy="0"/>
-          <a:chOff x="0" y="0"/>
-          <a:chExt cx="0" cy="0"/>
-        </a:xfrm>
-      </p:grpSpPr>
-      <p:sp>
-        <p:nvSpPr>
-          <p:cNvPr id="2" name="Slide Image Placeholder 1">
-            <a:extLst>
-              <a:ext uri="{FF2B5EF4-FFF2-40B4-BE49-F238E27FC236}">
-                <a16:creationId xmlns:a16="http://schemas.microsoft.com/office/drawing/2014/main" id="{54A34F9E-8D50-DE92-6735-7B08A11A1386}"/>
-              </a:ext>
-            </a:extLst>
-          </p:cNvPr>
-          <p:cNvSpPr>
-            <a:spLocks noGrp="1" noRot="1" noChangeAspect="1"/>
-          </p:cNvSpPr>
-          <p:nvPr>
-            <p:ph type="sldImg"/>
-          </p:nvPr>
-        </p:nvSpPr>
-        <p:spPr/>
-      </p:sp>
-      <p:sp>
-        <p:nvSpPr>
-          <p:cNvPr id="3" name="Notes Placeholder 2">
-            <a:extLst>
-              <a:ext uri="{FF2B5EF4-FFF2-40B4-BE49-F238E27FC236}">
-                <a16:creationId xmlns:a16="http://schemas.microsoft.com/office/drawing/2014/main" id="{CF400DBE-AD42-35B0-253D-E00D863D2CA1}"/>
-              </a:ext>
-            </a:extLst>
-          </p:cNvPr>
-          <p:cNvSpPr>
-            <a:spLocks noGrp="1"/>
-          </p:cNvSpPr>
-          <p:nvPr>
-            <p:ph type="body" idx="1"/>
-          </p:nvPr>
-        </p:nvSpPr>
-        <p:spPr/>
-        <p:txBody>
-          <a:bodyPr/>
-          <a:lstStyle/>
-          <a:p>
-            <a:endParaRPr lang="en-US" dirty="0"/>
-          </a:p>
-        </p:txBody>
-      </p:sp>
-      <p:sp>
-        <p:nvSpPr>
-          <p:cNvPr id="4" name="Slide Number Placeholder 3">
-            <a:extLst>
-              <a:ext uri="{FF2B5EF4-FFF2-40B4-BE49-F238E27FC236}">
-                <a16:creationId xmlns:a16="http://schemas.microsoft.com/office/drawing/2014/main" id="{694421AD-47C0-5937-6EFF-5EAE1F3CD317}"/>
-              </a:ext>
-            </a:extLst>
-          </p:cNvPr>
-          <p:cNvSpPr>
-            <a:spLocks noGrp="1"/>
-          </p:cNvSpPr>
-          <p:nvPr>
-            <p:ph type="sldNum" sz="quarter" idx="10"/>
-          </p:nvPr>
-        </p:nvSpPr>
-        <p:spPr/>
-        <p:txBody>
-          <a:bodyPr/>
-          <a:lstStyle/>
-          <a:p>
-            <a:fld id="{F7021451-1387-4CA6-816F-3879F97B5CBC}" type="slidenum">
-              <a:rPr lang="en-US"/>
-              <a:t>15</a:t>
-            </a:fld>
-            <a:endParaRPr lang="en-US"/>
-          </a:p>
-        </p:txBody>
-      </p:sp>
-    </p:spTree>
-    <p:extLst>
-      <p:ext uri="{BB962C8B-B14F-4D97-AF65-F5344CB8AC3E}">
-        <p14:creationId xmlns:p14="http://schemas.microsoft.com/office/powerpoint/2010/main" val="2203310796"/>
       </p:ext>
     </p:extLst>
   </p:cSld>
@@ -1101,7 +1101,7 @@
         <p:cNvPr id="1" name="">
           <a:extLst>
             <a:ext uri="{FF2B5EF4-FFF2-40B4-BE49-F238E27FC236}">
-              <a16:creationId xmlns:a16="http://schemas.microsoft.com/office/drawing/2014/main" id="{AC5510F3-E0D2-60EC-92CC-D5C2417B409D}"/>
+              <a16:creationId xmlns:a16="http://schemas.microsoft.com/office/drawing/2014/main" id="{63712C30-82C5-71ED-C888-8B7C6D9F5909}"/>
             </a:ext>
           </a:extLst>
         </p:cNvPr>
@@ -1121,7 +1121,7 @@
           <p:cNvPr id="2" name="Slide Image Placeholder 1">
             <a:extLst>
               <a:ext uri="{FF2B5EF4-FFF2-40B4-BE49-F238E27FC236}">
-                <a16:creationId xmlns:a16="http://schemas.microsoft.com/office/drawing/2014/main" id="{DB26DAF6-C580-6ECB-F25A-64A678B960A2}"/>
+                <a16:creationId xmlns:a16="http://schemas.microsoft.com/office/drawing/2014/main" id="{54A34F9E-8D50-DE92-6735-7B08A11A1386}"/>
               </a:ext>
             </a:extLst>
           </p:cNvPr>
@@ -1139,7 +1139,7 @@
           <p:cNvPr id="3" name="Notes Placeholder 2">
             <a:extLst>
               <a:ext uri="{FF2B5EF4-FFF2-40B4-BE49-F238E27FC236}">
-                <a16:creationId xmlns:a16="http://schemas.microsoft.com/office/drawing/2014/main" id="{50E6CF5A-86BB-F22D-2D53-F2553DFD295F}"/>
+                <a16:creationId xmlns:a16="http://schemas.microsoft.com/office/drawing/2014/main" id="{CF400DBE-AD42-35B0-253D-E00D863D2CA1}"/>
               </a:ext>
             </a:extLst>
           </p:cNvPr>
@@ -1164,7 +1164,7 @@
           <p:cNvPr id="4" name="Slide Number Placeholder 3">
             <a:extLst>
               <a:ext uri="{FF2B5EF4-FFF2-40B4-BE49-F238E27FC236}">
-                <a16:creationId xmlns:a16="http://schemas.microsoft.com/office/drawing/2014/main" id="{787E57DF-F9EA-351E-9500-E1988D3F7D83}"/>
+                <a16:creationId xmlns:a16="http://schemas.microsoft.com/office/drawing/2014/main" id="{694421AD-47C0-5937-6EFF-5EAE1F3CD317}"/>
               </a:ext>
             </a:extLst>
           </p:cNvPr>
@@ -1191,7 +1191,7 @@
     </p:spTree>
     <p:extLst>
       <p:ext uri="{BB962C8B-B14F-4D97-AF65-F5344CB8AC3E}">
-        <p14:creationId xmlns:p14="http://schemas.microsoft.com/office/powerpoint/2010/main" val="4234081208"/>
+        <p14:creationId xmlns:p14="http://schemas.microsoft.com/office/powerpoint/2010/main" val="2203310796"/>
       </p:ext>
     </p:extLst>
   </p:cSld>
@@ -1202,6 +1202,114 @@
 </file>
 
 <file path=ppt/notesSlides/notesSlide2.xml><?xml version="1.0" encoding="utf-8"?>
+<p:notes xmlns:a="http://schemas.openxmlformats.org/drawingml/2006/main" xmlns:r="http://schemas.openxmlformats.org/officeDocument/2006/relationships" xmlns:p="http://schemas.openxmlformats.org/presentationml/2006/main">
+  <p:cSld>
+    <p:spTree>
+      <p:nvGrpSpPr>
+        <p:cNvPr id="1" name="">
+          <a:extLst>
+            <a:ext uri="{FF2B5EF4-FFF2-40B4-BE49-F238E27FC236}">
+              <a16:creationId xmlns:a16="http://schemas.microsoft.com/office/drawing/2014/main" id="{11D28139-928B-516C-F2B0-687D31EAF89C}"/>
+            </a:ext>
+          </a:extLst>
+        </p:cNvPr>
+        <p:cNvGrpSpPr/>
+        <p:nvPr/>
+      </p:nvGrpSpPr>
+      <p:grpSpPr>
+        <a:xfrm>
+          <a:off x="0" y="0"/>
+          <a:ext cx="0" cy="0"/>
+          <a:chOff x="0" y="0"/>
+          <a:chExt cx="0" cy="0"/>
+        </a:xfrm>
+      </p:grpSpPr>
+      <p:sp>
+        <p:nvSpPr>
+          <p:cNvPr id="2" name="Slide Image Placeholder 1">
+            <a:extLst>
+              <a:ext uri="{FF2B5EF4-FFF2-40B4-BE49-F238E27FC236}">
+                <a16:creationId xmlns:a16="http://schemas.microsoft.com/office/drawing/2014/main" id="{B8C05F6D-76D1-6002-C12B-57937679E42E}"/>
+              </a:ext>
+            </a:extLst>
+          </p:cNvPr>
+          <p:cNvSpPr>
+            <a:spLocks noGrp="1" noRot="1" noChangeAspect="1"/>
+          </p:cNvSpPr>
+          <p:nvPr>
+            <p:ph type="sldImg"/>
+          </p:nvPr>
+        </p:nvSpPr>
+        <p:spPr/>
+      </p:sp>
+      <p:sp>
+        <p:nvSpPr>
+          <p:cNvPr id="3" name="Notes Placeholder 2">
+            <a:extLst>
+              <a:ext uri="{FF2B5EF4-FFF2-40B4-BE49-F238E27FC236}">
+                <a16:creationId xmlns:a16="http://schemas.microsoft.com/office/drawing/2014/main" id="{F237B622-CE58-2063-6F6B-20823F034722}"/>
+              </a:ext>
+            </a:extLst>
+          </p:cNvPr>
+          <p:cNvSpPr>
+            <a:spLocks noGrp="1"/>
+          </p:cNvSpPr>
+          <p:nvPr>
+            <p:ph type="body" idx="1"/>
+          </p:nvPr>
+        </p:nvSpPr>
+        <p:spPr/>
+        <p:txBody>
+          <a:bodyPr/>
+          <a:lstStyle/>
+          <a:p>
+            <a:endParaRPr lang="en-US" dirty="0"/>
+          </a:p>
+        </p:txBody>
+      </p:sp>
+      <p:sp>
+        <p:nvSpPr>
+          <p:cNvPr id="4" name="Slide Number Placeholder 3">
+            <a:extLst>
+              <a:ext uri="{FF2B5EF4-FFF2-40B4-BE49-F238E27FC236}">
+                <a16:creationId xmlns:a16="http://schemas.microsoft.com/office/drawing/2014/main" id="{87D36C69-53F3-C324-E35C-C263D50400D9}"/>
+              </a:ext>
+            </a:extLst>
+          </p:cNvPr>
+          <p:cNvSpPr>
+            <a:spLocks noGrp="1"/>
+          </p:cNvSpPr>
+          <p:nvPr>
+            <p:ph type="sldNum" sz="quarter" idx="10"/>
+          </p:nvPr>
+        </p:nvSpPr>
+        <p:spPr/>
+        <p:txBody>
+          <a:bodyPr/>
+          <a:lstStyle/>
+          <a:p>
+            <a:fld id="{F7021451-1387-4CA6-816F-3879F97B5CBC}" type="slidenum">
+              <a:rPr lang="en-US"/>
+              <a:t>2</a:t>
+            </a:fld>
+            <a:endParaRPr lang="en-US"/>
+          </a:p>
+        </p:txBody>
+      </p:sp>
+    </p:spTree>
+    <p:extLst>
+      <p:ext uri="{BB962C8B-B14F-4D97-AF65-F5344CB8AC3E}">
+        <p14:creationId xmlns:p14="http://schemas.microsoft.com/office/powerpoint/2010/main" val="2508624979"/>
+      </p:ext>
+    </p:extLst>
+  </p:cSld>
+  <p:clrMapOvr>
+    <a:masterClrMapping/>
+  </p:clrMapOvr>
+</p:notes>
+</file>
+
+<file path=ppt/notesSlides/notesSlide3.xml><?xml version="1.0" encoding="utf-8"?>
 <p:notes xmlns:a="http://schemas.openxmlformats.org/drawingml/2006/main" xmlns:r="http://schemas.openxmlformats.org/officeDocument/2006/relationships" xmlns:p="http://schemas.openxmlformats.org/presentationml/2006/main">
   <p:cSld>
     <p:spTree>
@@ -1290,7 +1398,7 @@
           <a:p>
             <a:fld id="{F7021451-1387-4CA6-816F-3879F97B5CBC}" type="slidenum">
               <a:rPr lang="en-US"/>
-              <a:t>2</a:t>
+              <a:t>3</a:t>
             </a:fld>
             <a:endParaRPr lang="en-US"/>
           </a:p>
@@ -1309,7 +1417,7 @@
 </p:notes>
 </file>
 
-<file path=ppt/notesSlides/notesSlide3.xml><?xml version="1.0" encoding="utf-8"?>
+<file path=ppt/notesSlides/notesSlide4.xml><?xml version="1.0" encoding="utf-8"?>
 <p:notes xmlns:a="http://schemas.openxmlformats.org/drawingml/2006/main" xmlns:r="http://schemas.openxmlformats.org/officeDocument/2006/relationships" xmlns:p="http://schemas.openxmlformats.org/presentationml/2006/main">
   <p:cSld>
     <p:spTree>
@@ -1398,7 +1506,7 @@
           <a:p>
             <a:fld id="{F7021451-1387-4CA6-816F-3879F97B5CBC}" type="slidenum">
               <a:rPr lang="en-US"/>
-              <a:t>3</a:t>
+              <a:t>4</a:t>
             </a:fld>
             <a:endParaRPr lang="en-US"/>
           </a:p>
@@ -1417,7 +1525,7 @@
 </p:notes>
 </file>
 
-<file path=ppt/notesSlides/notesSlide4.xml><?xml version="1.0" encoding="utf-8"?>
+<file path=ppt/notesSlides/notesSlide5.xml><?xml version="1.0" encoding="utf-8"?>
 <p:notes xmlns:a="http://schemas.openxmlformats.org/drawingml/2006/main" xmlns:r="http://schemas.openxmlformats.org/officeDocument/2006/relationships" xmlns:p="http://schemas.openxmlformats.org/presentationml/2006/main">
   <p:cSld>
     <p:spTree>
@@ -1482,7 +1590,7 @@
           <a:p>
             <a:fld id="{F7021451-1387-4CA6-816F-3879F97B5CBC}" type="slidenum">
               <a:rPr lang="en-US"/>
-              <a:t>4</a:t>
+              <a:t>5</a:t>
             </a:fld>
             <a:endParaRPr lang="en-US"/>
           </a:p>
@@ -1501,7 +1609,7 @@
 </p:notes>
 </file>
 
-<file path=ppt/notesSlides/notesSlide5.xml><?xml version="1.0" encoding="utf-8"?>
+<file path=ppt/notesSlides/notesSlide6.xml><?xml version="1.0" encoding="utf-8"?>
 <p:notes xmlns:a="http://schemas.openxmlformats.org/drawingml/2006/main" xmlns:r="http://schemas.openxmlformats.org/officeDocument/2006/relationships" xmlns:p="http://schemas.openxmlformats.org/presentationml/2006/main">
   <p:cSld>
     <p:spTree>
@@ -1590,7 +1698,7 @@
           <a:p>
             <a:fld id="{F7021451-1387-4CA6-816F-3879F97B5CBC}" type="slidenum">
               <a:rPr lang="en-US"/>
-              <a:t>5</a:t>
+              <a:t>6</a:t>
             </a:fld>
             <a:endParaRPr lang="en-US"/>
           </a:p>
@@ -1609,7 +1717,7 @@
 </p:notes>
 </file>
 
-<file path=ppt/notesSlides/notesSlide6.xml><?xml version="1.0" encoding="utf-8"?>
+<file path=ppt/notesSlides/notesSlide7.xml><?xml version="1.0" encoding="utf-8"?>
 <p:notes xmlns:a="http://schemas.openxmlformats.org/drawingml/2006/main" xmlns:r="http://schemas.openxmlformats.org/officeDocument/2006/relationships" xmlns:p="http://schemas.openxmlformats.org/presentationml/2006/main">
   <p:cSld>
     <p:spTree>
@@ -1698,7 +1806,7 @@
           <a:p>
             <a:fld id="{F7021451-1387-4CA6-816F-3879F97B5CBC}" type="slidenum">
               <a:rPr lang="en-US"/>
-              <a:t>6</a:t>
+              <a:t>7</a:t>
             </a:fld>
             <a:endParaRPr lang="en-US"/>
           </a:p>
@@ -1717,7 +1825,7 @@
 </p:notes>
 </file>
 
-<file path=ppt/notesSlides/notesSlide7.xml><?xml version="1.0" encoding="utf-8"?>
+<file path=ppt/notesSlides/notesSlide8.xml><?xml version="1.0" encoding="utf-8"?>
 <p:notes xmlns:a="http://schemas.openxmlformats.org/drawingml/2006/main" xmlns:r="http://schemas.openxmlformats.org/officeDocument/2006/relationships" xmlns:p="http://schemas.openxmlformats.org/presentationml/2006/main">
   <p:cSld>
     <p:spTree>
@@ -1806,7 +1914,7 @@
           <a:p>
             <a:fld id="{F7021451-1387-4CA6-816F-3879F97B5CBC}" type="slidenum">
               <a:rPr lang="en-US"/>
-              <a:t>7</a:t>
+              <a:t>8</a:t>
             </a:fld>
             <a:endParaRPr lang="en-US"/>
           </a:p>
@@ -1825,7 +1933,7 @@
 </p:notes>
 </file>
 
-<file path=ppt/notesSlides/notesSlide8.xml><?xml version="1.0" encoding="utf-8"?>
+<file path=ppt/notesSlides/notesSlide9.xml><?xml version="1.0" encoding="utf-8"?>
 <p:notes xmlns:a="http://schemas.openxmlformats.org/drawingml/2006/main" xmlns:r="http://schemas.openxmlformats.org/officeDocument/2006/relationships" xmlns:p="http://schemas.openxmlformats.org/presentationml/2006/main">
   <p:cSld>
     <p:spTree>
@@ -1890,7 +1998,7 @@
           <a:p>
             <a:fld id="{F7021451-1387-4CA6-816F-3879F97B5CBC}" type="slidenum">
               <a:rPr lang="en-US"/>
-              <a:t>8</a:t>
+              <a:t>9</a:t>
             </a:fld>
             <a:endParaRPr lang="en-US"/>
           </a:p>
@@ -1900,114 +2008,6 @@
     <p:extLst>
       <p:ext uri="{BB962C8B-B14F-4D97-AF65-F5344CB8AC3E}">
         <p14:creationId xmlns:p14="http://schemas.microsoft.com/office/powerpoint/2010/main" val="1024086991"/>
-      </p:ext>
-    </p:extLst>
-  </p:cSld>
-  <p:clrMapOvr>
-    <a:masterClrMapping/>
-  </p:clrMapOvr>
-</p:notes>
-</file>
-
-<file path=ppt/notesSlides/notesSlide9.xml><?xml version="1.0" encoding="utf-8"?>
-<p:notes xmlns:a="http://schemas.openxmlformats.org/drawingml/2006/main" xmlns:r="http://schemas.openxmlformats.org/officeDocument/2006/relationships" xmlns:p="http://schemas.openxmlformats.org/presentationml/2006/main">
-  <p:cSld>
-    <p:spTree>
-      <p:nvGrpSpPr>
-        <p:cNvPr id="1" name="">
-          <a:extLst>
-            <a:ext uri="{FF2B5EF4-FFF2-40B4-BE49-F238E27FC236}">
-              <a16:creationId xmlns:a16="http://schemas.microsoft.com/office/drawing/2014/main" id="{59C393F0-E5B8-CC63-F264-85348BE2BC21}"/>
-            </a:ext>
-          </a:extLst>
-        </p:cNvPr>
-        <p:cNvGrpSpPr/>
-        <p:nvPr/>
-      </p:nvGrpSpPr>
-      <p:grpSpPr>
-        <a:xfrm>
-          <a:off x="0" y="0"/>
-          <a:ext cx="0" cy="0"/>
-          <a:chOff x="0" y="0"/>
-          <a:chExt cx="0" cy="0"/>
-        </a:xfrm>
-      </p:grpSpPr>
-      <p:sp>
-        <p:nvSpPr>
-          <p:cNvPr id="2" name="Slide Image Placeholder 1">
-            <a:extLst>
-              <a:ext uri="{FF2B5EF4-FFF2-40B4-BE49-F238E27FC236}">
-                <a16:creationId xmlns:a16="http://schemas.microsoft.com/office/drawing/2014/main" id="{92E591F0-5A46-372F-8B3E-9DFD07AB5D90}"/>
-              </a:ext>
-            </a:extLst>
-          </p:cNvPr>
-          <p:cNvSpPr>
-            <a:spLocks noGrp="1" noRot="1" noChangeAspect="1"/>
-          </p:cNvSpPr>
-          <p:nvPr>
-            <p:ph type="sldImg"/>
-          </p:nvPr>
-        </p:nvSpPr>
-        <p:spPr/>
-      </p:sp>
-      <p:sp>
-        <p:nvSpPr>
-          <p:cNvPr id="3" name="Notes Placeholder 2">
-            <a:extLst>
-              <a:ext uri="{FF2B5EF4-FFF2-40B4-BE49-F238E27FC236}">
-                <a16:creationId xmlns:a16="http://schemas.microsoft.com/office/drawing/2014/main" id="{F450C544-5180-D698-7F37-1CD1DBCE7B71}"/>
-              </a:ext>
-            </a:extLst>
-          </p:cNvPr>
-          <p:cNvSpPr>
-            <a:spLocks noGrp="1"/>
-          </p:cNvSpPr>
-          <p:nvPr>
-            <p:ph type="body" idx="1"/>
-          </p:nvPr>
-        </p:nvSpPr>
-        <p:spPr/>
-        <p:txBody>
-          <a:bodyPr/>
-          <a:lstStyle/>
-          <a:p>
-            <a:endParaRPr lang="en-US" dirty="0"/>
-          </a:p>
-        </p:txBody>
-      </p:sp>
-      <p:sp>
-        <p:nvSpPr>
-          <p:cNvPr id="4" name="Slide Number Placeholder 3">
-            <a:extLst>
-              <a:ext uri="{FF2B5EF4-FFF2-40B4-BE49-F238E27FC236}">
-                <a16:creationId xmlns:a16="http://schemas.microsoft.com/office/drawing/2014/main" id="{E62A9FB7-B8FF-08C5-49BC-127FEA34F2E2}"/>
-              </a:ext>
-            </a:extLst>
-          </p:cNvPr>
-          <p:cNvSpPr>
-            <a:spLocks noGrp="1"/>
-          </p:cNvSpPr>
-          <p:nvPr>
-            <p:ph type="sldNum" sz="quarter" idx="10"/>
-          </p:nvPr>
-        </p:nvSpPr>
-        <p:spPr/>
-        <p:txBody>
-          <a:bodyPr/>
-          <a:lstStyle/>
-          <a:p>
-            <a:fld id="{F7021451-1387-4CA6-816F-3879F97B5CBC}" type="slidenum">
-              <a:rPr lang="en-US"/>
-              <a:t>9</a:t>
-            </a:fld>
-            <a:endParaRPr lang="en-US"/>
-          </a:p>
-        </p:txBody>
-      </p:sp>
-    </p:spTree>
-    <p:extLst>
-      <p:ext uri="{BB962C8B-B14F-4D97-AF65-F5344CB8AC3E}">
-        <p14:creationId xmlns:p14="http://schemas.microsoft.com/office/powerpoint/2010/main" val="3507848628"/>
       </p:ext>
     </p:extLst>
   </p:cSld>
@@ -2092,7 +2092,7 @@
           </a:prstGeom>
           <a:extLst>
             <a:ext uri="{C572A759-6A51-4108-AA02-DFA0A04FC94B}">
-              <ma14:wrappingTextBoxFlag xmlns:ma14="http://schemas.microsoft.com/office/mac/drawingml/2011/main" xmlns="" val="0"/>
+              <ma14:wrappingTextBoxFlag xmlns="" xmlns:ma14="http://schemas.microsoft.com/office/mac/drawingml/2011/main" val="0"/>
             </a:ext>
           </a:extLst>
         </p:spPr>
@@ -2173,7 +2173,7 @@
           </a:prstGeom>
           <a:extLst>
             <a:ext uri="{C572A759-6A51-4108-AA02-DFA0A04FC94B}">
-              <ma14:wrappingTextBoxFlag xmlns:ma14="http://schemas.microsoft.com/office/mac/drawingml/2011/main" xmlns="" val="0"/>
+              <ma14:wrappingTextBoxFlag xmlns="" xmlns:ma14="http://schemas.microsoft.com/office/mac/drawingml/2011/main" val="0"/>
             </a:ext>
           </a:extLst>
         </p:spPr>
@@ -2251,7 +2251,7 @@
           </a:prstGeom>
           <a:extLst>
             <a:ext uri="{C572A759-6A51-4108-AA02-DFA0A04FC94B}">
-              <ma14:wrappingTextBoxFlag xmlns:ma14="http://schemas.microsoft.com/office/mac/drawingml/2011/main" xmlns="" val="0"/>
+              <ma14:wrappingTextBoxFlag xmlns="" xmlns:ma14="http://schemas.microsoft.com/office/mac/drawingml/2011/main" val="0"/>
             </a:ext>
           </a:extLst>
         </p:spPr>
@@ -2557,7 +2557,184 @@
         <p:cNvPr id="1" name="">
           <a:extLst>
             <a:ext uri="{FF2B5EF4-FFF2-40B4-BE49-F238E27FC236}">
-              <a16:creationId xmlns:a16="http://schemas.microsoft.com/office/drawing/2014/main" id="{3E8B97A3-5D5F-E864-A63B-3BD2F24B19CC}"/>
+              <a16:creationId xmlns:a16="http://schemas.microsoft.com/office/drawing/2014/main" id="{3BEA6C72-C0EB-3DEB-D970-9E6AA5D7097A}"/>
+            </a:ext>
+          </a:extLst>
+        </p:cNvPr>
+        <p:cNvGrpSpPr/>
+        <p:nvPr/>
+      </p:nvGrpSpPr>
+      <p:grpSpPr>
+        <a:xfrm>
+          <a:off x="0" y="0"/>
+          <a:ext cx="0" cy="0"/>
+          <a:chOff x="0" y="0"/>
+          <a:chExt cx="0" cy="0"/>
+        </a:xfrm>
+      </p:grpSpPr>
+      <p:sp>
+        <p:nvSpPr>
+          <p:cNvPr id="60" name="TextBox 59">
+            <a:extLst>
+              <a:ext uri="{FF2B5EF4-FFF2-40B4-BE49-F238E27FC236}">
+                <a16:creationId xmlns:a16="http://schemas.microsoft.com/office/drawing/2014/main" id="{C175A081-3F76-6358-8C3A-A92B18E316F2}"/>
+              </a:ext>
+            </a:extLst>
+          </p:cNvPr>
+          <p:cNvSpPr txBox="1"/>
+          <p:nvPr/>
+        </p:nvSpPr>
+        <p:spPr>
+          <a:xfrm>
+            <a:off x="233622" y="306340"/>
+            <a:ext cx="2414982" cy="646331"/>
+          </a:xfrm>
+          <a:prstGeom prst="rect">
+            <a:avLst/>
+          </a:prstGeom>
+          <a:noFill/>
+        </p:spPr>
+        <p:txBody>
+          <a:bodyPr wrap="square">
+            <a:spAutoFit/>
+          </a:bodyPr>
+          <a:lstStyle/>
+          <a:p>
+            <a:pPr marL="0" indent="0">
+              <a:buNone/>
+            </a:pPr>
+            <a:r>
+              <a:rPr lang="en-US" sz="3600">
+                <a:solidFill>
+                  <a:schemeClr val="bg1"/>
+                </a:solidFill>
+                <a:latin typeface="VTB Group UI Semi Bold" panose="020B0603050504020204" pitchFamily="34" charset="-52"/>
+              </a:rPr>
+              <a:t>Links:</a:t>
+            </a:r>
+            <a:endParaRPr lang="en-US" sz="3600" dirty="0">
+              <a:solidFill>
+                <a:schemeClr val="bg1"/>
+              </a:solidFill>
+              <a:latin typeface="VTB Group UI Semi Bold" panose="020B0603050504020204" pitchFamily="34" charset="-52"/>
+            </a:endParaRPr>
+          </a:p>
+        </p:txBody>
+      </p:sp>
+      <p:sp>
+        <p:nvSpPr>
+          <p:cNvPr id="5" name="TextBox 4">
+            <a:extLst>
+              <a:ext uri="{FF2B5EF4-FFF2-40B4-BE49-F238E27FC236}">
+                <a16:creationId xmlns:a16="http://schemas.microsoft.com/office/drawing/2014/main" id="{29F0B69A-4B4E-11EF-7139-F28DA9507C3F}"/>
+              </a:ext>
+            </a:extLst>
+          </p:cNvPr>
+          <p:cNvSpPr txBox="1"/>
+          <p:nvPr/>
+        </p:nvSpPr>
+        <p:spPr>
+          <a:xfrm>
+            <a:off x="233622" y="908527"/>
+            <a:ext cx="11069201" cy="1200329"/>
+          </a:xfrm>
+          <a:prstGeom prst="rect">
+            <a:avLst/>
+          </a:prstGeom>
+          <a:noFill/>
+        </p:spPr>
+        <p:txBody>
+          <a:bodyPr wrap="square">
+            <a:spAutoFit/>
+          </a:bodyPr>
+          <a:lstStyle/>
+          <a:p>
+            <a:pPr marL="0" indent="0">
+              <a:buNone/>
+            </a:pPr>
+            <a:r>
+              <a:rPr lang="en-US" sz="3600">
+                <a:solidFill>
+                  <a:schemeClr val="bg1"/>
+                </a:solidFill>
+                <a:latin typeface="VTB Group UI Book" panose="020B0503040504020204" pitchFamily="34" charset="-52"/>
+              </a:rPr>
+              <a:t>1) </a:t>
+            </a:r>
+            <a:r>
+              <a:rPr lang="en-US" sz="3600">
+                <a:solidFill>
+                  <a:schemeClr val="bg1"/>
+                </a:solidFill>
+                <a:latin typeface="VTB Group UI Book" panose="020B0503040504020204" pitchFamily="34" charset="-52"/>
+                <a:hlinkClick r:id="rId3">
+                  <a:extLst>
+                    <a:ext uri="{A12FA001-AC4F-418D-AE19-62706E023703}">
+                      <ahyp:hlinkClr xmlns:ahyp="http://schemas.microsoft.com/office/drawing/2018/hyperlinkcolor" val="tx"/>
+                    </a:ext>
+                  </a:extLst>
+                </a:hlinkClick>
+              </a:rPr>
+              <a:t>https://clck.ru/3WcFW7</a:t>
+            </a:r>
+            <a:r>
+              <a:rPr lang="en-US" sz="3600">
+                <a:solidFill>
+                  <a:schemeClr val="bg1"/>
+                </a:solidFill>
+                <a:latin typeface="VTB Group UI Book" panose="020B0503040504020204" pitchFamily="34" charset="-52"/>
+              </a:rPr>
+              <a:t> - UI Kit + User Flow </a:t>
+            </a:r>
+            <a:r>
+              <a:rPr lang="ru-RU" sz="3600">
+                <a:solidFill>
+                  <a:schemeClr val="bg1"/>
+                </a:solidFill>
+                <a:latin typeface="VTB Group UI Book" panose="020B0503040504020204" pitchFamily="34" charset="-52"/>
+              </a:rPr>
+              <a:t>в </a:t>
+            </a:r>
+            <a:r>
+              <a:rPr lang="en-US" sz="3600">
+                <a:solidFill>
+                  <a:schemeClr val="bg1"/>
+                </a:solidFill>
+                <a:latin typeface="VTB Group UI Book" panose="020B0503040504020204" pitchFamily="34" charset="-52"/>
+              </a:rPr>
+              <a:t>Figma</a:t>
+            </a:r>
+            <a:endParaRPr lang="en-US" sz="3600" dirty="0">
+              <a:solidFill>
+                <a:schemeClr val="bg1"/>
+              </a:solidFill>
+              <a:latin typeface="VTB Group UI Book" panose="020B0503040504020204" pitchFamily="34" charset="-52"/>
+            </a:endParaRPr>
+          </a:p>
+        </p:txBody>
+      </p:sp>
+    </p:spTree>
+    <p:extLst>
+      <p:ext uri="{BB962C8B-B14F-4D97-AF65-F5344CB8AC3E}">
+        <p14:creationId xmlns:p14="http://schemas.microsoft.com/office/powerpoint/2010/main" val="1276963337"/>
+      </p:ext>
+    </p:extLst>
+  </p:cSld>
+  <p:clrMapOvr>
+    <a:masterClrMapping/>
+  </p:clrMapOvr>
+</p:sld>
+</file>
+
+<file path=ppt/slides/slide10.xml><?xml version="1.0" encoding="utf-8"?>
+<p:sld xmlns:a="http://schemas.openxmlformats.org/drawingml/2006/main" xmlns:r="http://schemas.openxmlformats.org/officeDocument/2006/relationships" xmlns:p="http://schemas.openxmlformats.org/presentationml/2006/main">
+  <p:cSld>
+    <p:spTree>
+      <p:nvGrpSpPr>
+        <p:cNvPr id="1" name="">
+          <a:extLst>
+            <a:ext uri="{FF2B5EF4-FFF2-40B4-BE49-F238E27FC236}">
+              <a16:creationId xmlns:a16="http://schemas.microsoft.com/office/drawing/2014/main" id="{69B229D1-6730-6FED-67C7-A311CE6A3375}"/>
             </a:ext>
           </a:extLst>
         </p:cNvPr>
@@ -2577,7 +2754,7 @@
           <p:cNvPr id="3" name="Text 1">
             <a:extLst>
               <a:ext uri="{FF2B5EF4-FFF2-40B4-BE49-F238E27FC236}">
-                <a16:creationId xmlns:a16="http://schemas.microsoft.com/office/drawing/2014/main" id="{B05BABAC-7334-6DB3-BD3A-9B51A694F9DB}"/>
+                <a16:creationId xmlns:a16="http://schemas.microsoft.com/office/drawing/2014/main" id="{BB7CAC6B-C46B-89C4-2765-FA4CB113F8FB}"/>
               </a:ext>
             </a:extLst>
           </p:cNvPr>
@@ -2586,8 +2763,8 @@
         </p:nvSpPr>
         <p:spPr>
           <a:xfrm>
-            <a:off x="5808213" y="3817661"/>
-            <a:ext cx="5845071" cy="1330296"/>
+            <a:off x="655320" y="274320"/>
+            <a:ext cx="10881360" cy="822960"/>
           </a:xfrm>
           <a:prstGeom prst="rect">
             <a:avLst/>
@@ -2599,35 +2776,49 @@
           <a:bodyPr wrap="square" lIns="0" tIns="0" rIns="0" bIns="0" rtlCol="0" anchor="t"/>
           <a:lstStyle/>
           <a:p>
-            <a:pPr marL="0" indent="0" algn="ctr">
+            <a:pPr marL="0" indent="0">
               <a:buNone/>
             </a:pPr>
-            <a:r>
-              <a:rPr lang="ru-RU" sz="3600">
-                <a:solidFill>
-                  <a:schemeClr val="bg1"/>
-                </a:solidFill>
-                <a:latin typeface="VTB Group UI Book" panose="020B0503040504020204" pitchFamily="34" charset="-52"/>
-                <a:ea typeface="VTB Group UI Semi Bold" pitchFamily="34" charset="-122"/>
-                <a:cs typeface="VTB Group UI Semi Bold" pitchFamily="34" charset="-120"/>
-              </a:rPr>
-              <a:t>Общее рабочее место</a:t>
-            </a:r>
-            <a:endParaRPr lang="en-US" sz="3600" dirty="0">
-              <a:solidFill>
-                <a:schemeClr val="bg1"/>
-              </a:solidFill>
-              <a:latin typeface="VTB Group UI Book" panose="020B0503040504020204" pitchFamily="34" charset="-52"/>
-            </a:endParaRPr>
+            <a:endParaRPr lang="en-US" sz="3400" dirty="0"/>
           </a:p>
         </p:txBody>
       </p:sp>
+      <p:pic>
+        <p:nvPicPr>
+          <p:cNvPr id="8" name="Image 1" descr="/tmp/claude-0/-home-claude/3e2c67bf-185e-57a7-b169-f73d7abaeeba/scratchpad/flow/deck2/miro.png">
+            <a:extLst>
+              <a:ext uri="{FF2B5EF4-FFF2-40B4-BE49-F238E27FC236}">
+                <a16:creationId xmlns:a16="http://schemas.microsoft.com/office/drawing/2014/main" id="{A7FA4C60-B0FB-D700-2FE1-F17BE6B7BFE4}"/>
+              </a:ext>
+            </a:extLst>
+          </p:cNvPr>
+          <p:cNvPicPr>
+            <a:picLocks noChangeAspect="1"/>
+          </p:cNvPicPr>
+          <p:nvPr/>
+        </p:nvPicPr>
+        <p:blipFill>
+          <a:blip r:embed="rId3"/>
+          <a:stretch>
+            <a:fillRect/>
+          </a:stretch>
+        </p:blipFill>
+        <p:spPr>
+          <a:xfrm>
+            <a:off x="0" y="0"/>
+            <a:ext cx="12220774" cy="5582093"/>
+          </a:xfrm>
+          <a:prstGeom prst="rect">
+            <a:avLst/>
+          </a:prstGeom>
+        </p:spPr>
+      </p:pic>
       <p:sp>
         <p:nvSpPr>
-          <p:cNvPr id="17" name="Text 1">
+          <p:cNvPr id="7" name="TextBox 6">
             <a:extLst>
               <a:ext uri="{FF2B5EF4-FFF2-40B4-BE49-F238E27FC236}">
-                <a16:creationId xmlns:a16="http://schemas.microsoft.com/office/drawing/2014/main" id="{F008D2FF-D423-6859-77B9-DA374BD354BE}"/>
+                <a16:creationId xmlns:a16="http://schemas.microsoft.com/office/drawing/2014/main" id="{EC506A6A-4E49-1190-C714-766A15A6D0F3}"/>
               </a:ext>
             </a:extLst>
           </p:cNvPr>
@@ -2636,55 +2827,8 @@
         </p:nvSpPr>
         <p:spPr>
           <a:xfrm>
-            <a:off x="4042498" y="2592329"/>
-            <a:ext cx="4293427" cy="1673341"/>
-          </a:xfrm>
-          <a:prstGeom prst="rect">
-            <a:avLst/>
-          </a:prstGeom>
-          <a:noFill/>
-          <a:ln/>
-        </p:spPr>
-        <p:txBody>
-          <a:bodyPr wrap="square" lIns="0" tIns="0" rIns="0" bIns="0" rtlCol="0" anchor="t"/>
-          <a:lstStyle/>
-          <a:p>
-            <a:pPr marL="0" indent="0" algn="ctr">
-              <a:buNone/>
-            </a:pPr>
-            <a:r>
-              <a:rPr lang="ru-RU" sz="8000">
-                <a:solidFill>
-                  <a:schemeClr val="bg1"/>
-                </a:solidFill>
-                <a:latin typeface="VTB Group UI Semi Bold" pitchFamily="34" charset="0"/>
-              </a:rPr>
-              <a:t>Доска</a:t>
-            </a:r>
-            <a:endParaRPr lang="en-US" sz="8000" dirty="0">
-              <a:solidFill>
-                <a:schemeClr val="bg1"/>
-              </a:solidFill>
-            </a:endParaRPr>
-          </a:p>
-        </p:txBody>
-      </p:sp>
-      <p:sp>
-        <p:nvSpPr>
-          <p:cNvPr id="58" name="TextBox 57">
-            <a:extLst>
-              <a:ext uri="{FF2B5EF4-FFF2-40B4-BE49-F238E27FC236}">
-                <a16:creationId xmlns:a16="http://schemas.microsoft.com/office/drawing/2014/main" id="{13E0278D-BF6E-62E3-47EF-806252063EB4}"/>
-              </a:ext>
-            </a:extLst>
-          </p:cNvPr>
-          <p:cNvSpPr txBox="1"/>
-          <p:nvPr/>
-        </p:nvSpPr>
-        <p:spPr>
-          <a:xfrm>
-            <a:off x="5372278" y="2394009"/>
-            <a:ext cx="5579256" cy="646331"/>
+            <a:off x="1" y="5529559"/>
+            <a:ext cx="12191999" cy="1323439"/>
           </a:xfrm>
           <a:prstGeom prst="rect">
             <a:avLst/>
@@ -2701,76 +2845,31 @@
               <a:buNone/>
             </a:pPr>
             <a:r>
-              <a:rPr lang="ru-RU" sz="3600">
-                <a:solidFill>
-                  <a:schemeClr val="bg1"/>
-                </a:solidFill>
-                <a:latin typeface="VTB Group UI Book" panose="020B0503040504020204" pitchFamily="34" charset="-52"/>
-              </a:rPr>
-              <a:t>Контекст</a:t>
-            </a:r>
-            <a:endParaRPr lang="en-US" sz="3600" dirty="0">
-              <a:solidFill>
-                <a:schemeClr val="bg1"/>
-              </a:solidFill>
-              <a:latin typeface="VTB Group UI Book" panose="020B0503040504020204" pitchFamily="34" charset="-52"/>
-            </a:endParaRPr>
-          </a:p>
-        </p:txBody>
-      </p:sp>
-      <p:sp>
-        <p:nvSpPr>
-          <p:cNvPr id="60" name="TextBox 59">
-            <a:extLst>
-              <a:ext uri="{FF2B5EF4-FFF2-40B4-BE49-F238E27FC236}">
-                <a16:creationId xmlns:a16="http://schemas.microsoft.com/office/drawing/2014/main" id="{084719E8-4732-D611-9D96-10020505779F}"/>
-              </a:ext>
-            </a:extLst>
-          </p:cNvPr>
-          <p:cNvSpPr txBox="1"/>
-          <p:nvPr/>
-        </p:nvSpPr>
-        <p:spPr>
-          <a:xfrm>
-            <a:off x="1122799" y="2172977"/>
-            <a:ext cx="5579256" cy="646331"/>
-          </a:xfrm>
-          <a:prstGeom prst="rect">
-            <a:avLst/>
-          </a:prstGeom>
-          <a:noFill/>
-        </p:spPr>
-        <p:txBody>
-          <a:bodyPr wrap="square">
-            <a:spAutoFit/>
-          </a:bodyPr>
-          <a:lstStyle/>
-          <a:p>
-            <a:pPr marL="0" indent="0" algn="ctr">
-              <a:buNone/>
-            </a:pPr>
-            <a:r>
-              <a:rPr lang="ru-RU" sz="3600">
-                <a:solidFill>
-                  <a:schemeClr val="bg1"/>
-                </a:solidFill>
-                <a:latin typeface="VTB Group UI Book" panose="020B0503040504020204" pitchFamily="34" charset="-52"/>
-              </a:rPr>
-              <a:t>Визуализация</a:t>
-            </a:r>
-            <a:endParaRPr lang="en-US" sz="3600" dirty="0">
-              <a:solidFill>
-                <a:schemeClr val="bg1"/>
-              </a:solidFill>
-              <a:latin typeface="VTB Group UI Book" panose="020B0503040504020204" pitchFamily="34" charset="-52"/>
-            </a:endParaRPr>
+              <a:rPr lang="ru-RU" sz="8000">
+                <a:solidFill>
+                  <a:srgbClr val="0B1733"/>
+                </a:solidFill>
+                <a:latin typeface="VTB Group UI Semi Bold" pitchFamily="34" charset="0"/>
+              </a:rPr>
+              <a:t>Аналог</a:t>
+            </a:r>
+            <a:r>
+              <a:rPr lang="en-US" sz="8000">
+                <a:solidFill>
+                  <a:srgbClr val="0B1733"/>
+                </a:solidFill>
+                <a:latin typeface="VTB Group UI Semi Bold" pitchFamily="34" charset="0"/>
+              </a:rPr>
+              <a:t>#2 Miro</a:t>
+            </a:r>
+            <a:endParaRPr lang="en-US" sz="8000" dirty="0"/>
           </a:p>
         </p:txBody>
       </p:sp>
     </p:spTree>
     <p:extLst>
       <p:ext uri="{BB962C8B-B14F-4D97-AF65-F5344CB8AC3E}">
-        <p14:creationId xmlns:p14="http://schemas.microsoft.com/office/powerpoint/2010/main" val="2896127051"/>
+        <p14:creationId xmlns:p14="http://schemas.microsoft.com/office/powerpoint/2010/main" val="1904169749"/>
       </p:ext>
     </p:extLst>
   </p:cSld>
@@ -2780,7 +2879,7 @@
 </p:sld>
 </file>
 
-<file path=ppt/slides/slide10.xml><?xml version="1.0" encoding="utf-8"?>
+<file path=ppt/slides/slide11.xml><?xml version="1.0" encoding="utf-8"?>
 <p:sld xmlns:a="http://schemas.openxmlformats.org/drawingml/2006/main" xmlns:r="http://schemas.openxmlformats.org/officeDocument/2006/relationships" xmlns:p="http://schemas.openxmlformats.org/presentationml/2006/main">
   <p:cSld>
     <p:spTree>
@@ -2894,7 +2993,7 @@
 </p:sld>
 </file>
 
-<file path=ppt/slides/slide11.xml><?xml version="1.0" encoding="utf-8"?>
+<file path=ppt/slides/slide12.xml><?xml version="1.0" encoding="utf-8"?>
 <p:sld xmlns:a="http://schemas.openxmlformats.org/drawingml/2006/main" xmlns:r="http://schemas.openxmlformats.org/officeDocument/2006/relationships" xmlns:p="http://schemas.openxmlformats.org/presentationml/2006/main">
   <p:cSld>
     <p:spTree>
@@ -3004,7 +3103,7 @@
 </p:sld>
 </file>
 
-<file path=ppt/slides/slide12.xml><?xml version="1.0" encoding="utf-8"?>
+<file path=ppt/slides/slide13.xml><?xml version="1.0" encoding="utf-8"?>
 <p:sld xmlns:a="http://schemas.openxmlformats.org/drawingml/2006/main" xmlns:r="http://schemas.openxmlformats.org/officeDocument/2006/relationships" xmlns:p="http://schemas.openxmlformats.org/presentationml/2006/main">
   <p:cSld name="Slide 6">
     <p:spTree>
@@ -3150,7 +3249,7 @@
 </p:sld>
 </file>
 
-<file path=ppt/slides/slide13.xml><?xml version="1.0" encoding="utf-8"?>
+<file path=ppt/slides/slide14.xml><?xml version="1.0" encoding="utf-8"?>
 <p:sld xmlns:a="http://schemas.openxmlformats.org/drawingml/2006/main" xmlns:r="http://schemas.openxmlformats.org/officeDocument/2006/relationships" xmlns:p="http://schemas.openxmlformats.org/presentationml/2006/main">
   <p:cSld>
     <p:spTree>
@@ -3319,7 +3418,7 @@
 </p:sld>
 </file>
 
-<file path=ppt/slides/slide14.xml><?xml version="1.0" encoding="utf-8"?>
+<file path=ppt/slides/slide15.xml><?xml version="1.0" encoding="utf-8"?>
 <p:sld xmlns:a="http://schemas.openxmlformats.org/drawingml/2006/main" xmlns:r="http://schemas.openxmlformats.org/officeDocument/2006/relationships" xmlns:p="http://schemas.openxmlformats.org/presentationml/2006/main">
   <p:cSld>
     <p:spTree>
@@ -3500,237 +3599,6 @@
     <p:extLst>
       <p:ext uri="{BB962C8B-B14F-4D97-AF65-F5344CB8AC3E}">
         <p14:creationId xmlns:p14="http://schemas.microsoft.com/office/powerpoint/2010/main" val="2931329618"/>
-      </p:ext>
-    </p:extLst>
-  </p:cSld>
-  <p:clrMapOvr>
-    <a:masterClrMapping/>
-  </p:clrMapOvr>
-</p:sld>
-</file>
-
-<file path=ppt/slides/slide15.xml><?xml version="1.0" encoding="utf-8"?>
-<p:sld xmlns:a="http://schemas.openxmlformats.org/drawingml/2006/main" xmlns:r="http://schemas.openxmlformats.org/officeDocument/2006/relationships" xmlns:p="http://schemas.openxmlformats.org/presentationml/2006/main">
-  <p:cSld>
-    <p:spTree>
-      <p:nvGrpSpPr>
-        <p:cNvPr id="1" name="">
-          <a:extLst>
-            <a:ext uri="{FF2B5EF4-FFF2-40B4-BE49-F238E27FC236}">
-              <a16:creationId xmlns:a16="http://schemas.microsoft.com/office/drawing/2014/main" id="{9245AD0C-DE16-7845-93A2-10B69CD5E17B}"/>
-            </a:ext>
-          </a:extLst>
-        </p:cNvPr>
-        <p:cNvGrpSpPr/>
-        <p:nvPr/>
-      </p:nvGrpSpPr>
-      <p:grpSpPr>
-        <a:xfrm>
-          <a:off x="0" y="0"/>
-          <a:ext cx="0" cy="0"/>
-          <a:chOff x="0" y="0"/>
-          <a:chExt cx="0" cy="0"/>
-        </a:xfrm>
-      </p:grpSpPr>
-      <p:sp>
-        <p:nvSpPr>
-          <p:cNvPr id="5" name="TextBox 4">
-            <a:extLst>
-              <a:ext uri="{FF2B5EF4-FFF2-40B4-BE49-F238E27FC236}">
-                <a16:creationId xmlns:a16="http://schemas.microsoft.com/office/drawing/2014/main" id="{57550A58-FFC6-43B0-1AE1-7EE47A016410}"/>
-              </a:ext>
-            </a:extLst>
-          </p:cNvPr>
-          <p:cNvSpPr txBox="1"/>
-          <p:nvPr/>
-        </p:nvSpPr>
-        <p:spPr>
-          <a:xfrm>
-            <a:off x="534296" y="404705"/>
-            <a:ext cx="11261464" cy="830997"/>
-          </a:xfrm>
-          <a:prstGeom prst="rect">
-            <a:avLst/>
-          </a:prstGeom>
-          <a:noFill/>
-        </p:spPr>
-        <p:txBody>
-          <a:bodyPr wrap="square">
-            <a:spAutoFit/>
-          </a:bodyPr>
-          <a:lstStyle/>
-          <a:p>
-            <a:pPr algn="ctr"/>
-            <a:r>
-              <a:rPr lang="ru-RU" sz="4800">
-                <a:solidFill>
-                  <a:srgbClr val="0B1733"/>
-                </a:solidFill>
-                <a:latin typeface="VTB Group UI Semi Bold" pitchFamily="34" charset="0"/>
-                <a:ea typeface="VTB Group UI Semi Bold" pitchFamily="34" charset="-122"/>
-                <a:cs typeface="VTB Group UI Semi Bold" pitchFamily="34" charset="-120"/>
-              </a:rPr>
-              <a:t>Техническое Задание (ТЗ)</a:t>
-            </a:r>
-            <a:endParaRPr lang="ru-RU" sz="3200"/>
-          </a:p>
-        </p:txBody>
-      </p:sp>
-      <p:graphicFrame>
-        <p:nvGraphicFramePr>
-          <p:cNvPr id="2" name="Таблица 1">
-            <a:extLst>
-              <a:ext uri="{FF2B5EF4-FFF2-40B4-BE49-F238E27FC236}">
-                <a16:creationId xmlns:a16="http://schemas.microsoft.com/office/drawing/2014/main" id="{B36205F3-E636-C5C8-6F4F-599DB0F79BA1}"/>
-              </a:ext>
-            </a:extLst>
-          </p:cNvPr>
-          <p:cNvGraphicFramePr>
-            <a:graphicFrameLocks noGrp="1"/>
-          </p:cNvGraphicFramePr>
-          <p:nvPr>
-            <p:extLst>
-              <p:ext uri="{D42A27DB-BD31-4B8C-83A1-F6EECF244321}">
-                <p14:modId xmlns:p14="http://schemas.microsoft.com/office/powerpoint/2010/main" val="1097330518"/>
-              </p:ext>
-            </p:extLst>
-          </p:nvPr>
-        </p:nvGraphicFramePr>
-        <p:xfrm>
-          <a:off x="534295" y="1453313"/>
-          <a:ext cx="11261464" cy="2148473"/>
-        </p:xfrm>
-        <a:graphic>
-          <a:graphicData uri="http://schemas.openxmlformats.org/drawingml/2006/table">
-            <a:tbl>
-              <a:tblPr firstRow="1" bandRow="1">
-                <a:tableStyleId>{7E9639D4-E3E2-4D34-9284-5A2195B3D0D7}</a:tableStyleId>
-              </a:tblPr>
-              <a:tblGrid>
-                <a:gridCol w="5630732">
-                  <a:extLst>
-                    <a:ext uri="{9D8B030D-6E8A-4147-A177-3AD203B41FA5}">
-                      <a16:colId xmlns:a16="http://schemas.microsoft.com/office/drawing/2014/main" val="1316740329"/>
-                    </a:ext>
-                  </a:extLst>
-                </a:gridCol>
-                <a:gridCol w="5630732">
-                  <a:extLst>
-                    <a:ext uri="{9D8B030D-6E8A-4147-A177-3AD203B41FA5}">
-                      <a16:colId xmlns:a16="http://schemas.microsoft.com/office/drawing/2014/main" val="3952294350"/>
-                    </a:ext>
-                  </a:extLst>
-                </a:gridCol>
-              </a:tblGrid>
-              <a:tr h="481813">
-                <a:tc>
-                  <a:txBody>
-                    <a:bodyPr/>
-                    <a:lstStyle/>
-                    <a:p>
-                      <a:pPr algn="ctr"/>
-                      <a:r>
-                        <a:rPr lang="ru-RU"/>
-                        <a:t>Этап</a:t>
-                      </a:r>
-                    </a:p>
-                  </a:txBody>
-                  <a:tcPr>
-                    <a:solidFill>
-                      <a:srgbClr val="0062FF"/>
-                    </a:solidFill>
-                  </a:tcPr>
-                </a:tc>
-                <a:tc>
-                  <a:txBody>
-                    <a:bodyPr/>
-                    <a:lstStyle/>
-                    <a:p>
-                      <a:pPr algn="ctr"/>
-                      <a:r>
-                        <a:rPr lang="ru-RU"/>
-                        <a:t>Ориентировочный срок</a:t>
-                      </a:r>
-                    </a:p>
-                  </a:txBody>
-                  <a:tcPr>
-                    <a:solidFill>
-                      <a:srgbClr val="0062FF"/>
-                    </a:solidFill>
-                  </a:tcPr>
-                </a:tc>
-                <a:extLst>
-                  <a:ext uri="{0D108BD9-81ED-4DB2-BD59-A6C34878D82A}">
-                    <a16:rowId xmlns:a16="http://schemas.microsoft.com/office/drawing/2014/main" val="3901080250"/>
-                  </a:ext>
-                </a:extLst>
-              </a:tr>
-              <a:tr h="833330">
-                <a:tc>
-                  <a:txBody>
-                    <a:bodyPr/>
-                    <a:lstStyle/>
-                    <a:p>
-                      <a:pPr algn="l"/>
-                      <a:endParaRPr lang="ru-RU"/>
-                    </a:p>
-                  </a:txBody>
-                  <a:tcPr marL="182880" anchor="ctr"/>
-                </a:tc>
-                <a:tc>
-                  <a:txBody>
-                    <a:bodyPr/>
-                    <a:lstStyle/>
-                    <a:p>
-                      <a:pPr algn="ctr"/>
-                      <a:endParaRPr lang="ru-RU"/>
-                    </a:p>
-                  </a:txBody>
-                  <a:tcPr anchor="ctr"/>
-                </a:tc>
-                <a:extLst>
-                  <a:ext uri="{0D108BD9-81ED-4DB2-BD59-A6C34878D82A}">
-                    <a16:rowId xmlns:a16="http://schemas.microsoft.com/office/drawing/2014/main" val="1306159448"/>
-                  </a:ext>
-                </a:extLst>
-              </a:tr>
-              <a:tr h="833330">
-                <a:tc>
-                  <a:txBody>
-                    <a:bodyPr/>
-                    <a:lstStyle/>
-                    <a:p>
-                      <a:pPr algn="l"/>
-                      <a:endParaRPr lang="ru-RU"/>
-                    </a:p>
-                  </a:txBody>
-                  <a:tcPr marL="182880" anchor="ctr"/>
-                </a:tc>
-                <a:tc>
-                  <a:txBody>
-                    <a:bodyPr/>
-                    <a:lstStyle/>
-                    <a:p>
-                      <a:pPr algn="ctr"/>
-                      <a:endParaRPr lang="ru-RU"/>
-                    </a:p>
-                  </a:txBody>
-                  <a:tcPr anchor="ctr"/>
-                </a:tc>
-                <a:extLst>
-                  <a:ext uri="{0D108BD9-81ED-4DB2-BD59-A6C34878D82A}">
-                    <a16:rowId xmlns:a16="http://schemas.microsoft.com/office/drawing/2014/main" val="1610479619"/>
-                  </a:ext>
-                </a:extLst>
-              </a:tr>
-            </a:tbl>
-          </a:graphicData>
-        </a:graphic>
-      </p:graphicFrame>
-    </p:spTree>
-    <p:extLst>
-      <p:ext uri="{BB962C8B-B14F-4D97-AF65-F5344CB8AC3E}">
-        <p14:creationId xmlns:p14="http://schemas.microsoft.com/office/powerpoint/2010/main" val="73692638"/>
       </p:ext>
     </p:extLst>
   </p:cSld>
@@ -3822,7 +3690,7 @@
         <p:spPr>
           <a:xfrm>
             <a:off x="706543" y="1590905"/>
-            <a:ext cx="10916969" cy="5078313"/>
+            <a:ext cx="10916969" cy="3693319"/>
           </a:xfrm>
           <a:prstGeom prst="rect">
             <a:avLst/>
@@ -3836,7 +3704,7 @@
           <a:lstStyle/>
           <a:p>
             <a:r>
-              <a:rPr lang="ru-RU" sz="3600">
+              <a:rPr lang="ru-RU">
                 <a:solidFill>
                   <a:schemeClr val="tx1">
                     <a:lumMod val="95000"/>
@@ -3848,7 +3716,7 @@
               <a:t>1)</a:t>
             </a:r>
             <a:r>
-              <a:rPr lang="en-US" sz="3600">
+              <a:rPr lang="en-US">
                 <a:solidFill>
                   <a:schemeClr val="tx1">
                     <a:lumMod val="95000"/>
@@ -3860,7 +3728,7 @@
               <a:t>    </a:t>
             </a:r>
             <a:r>
-              <a:rPr lang="ru-RU" sz="3600">
+              <a:rPr lang="ru-RU">
                 <a:solidFill>
                   <a:schemeClr val="tx1">
                     <a:lumMod val="95000"/>
@@ -3872,7 +3740,7 @@
               <a:t>Составление</a:t>
             </a:r>
             <a:r>
-              <a:rPr lang="en-US" sz="3600">
+              <a:rPr lang="en-US">
                 <a:solidFill>
                   <a:schemeClr val="tx1">
                     <a:lumMod val="95000"/>
@@ -3884,7 +3752,7 @@
               <a:t> | </a:t>
             </a:r>
             <a:r>
-              <a:rPr lang="ru-RU" sz="3600">
+              <a:rPr lang="ru-RU">
                 <a:solidFill>
                   <a:schemeClr val="tx1">
                     <a:lumMod val="95000"/>
@@ -3896,7 +3764,7 @@
               <a:t>Анализ требований</a:t>
             </a:r>
             <a:r>
-              <a:rPr lang="en-US" sz="3600">
+              <a:rPr lang="en-US">
                 <a:solidFill>
                   <a:schemeClr val="tx1">
                     <a:lumMod val="95000"/>
@@ -3907,7 +3775,7 @@
               </a:rPr>
               <a:t> </a:t>
             </a:r>
-            <a:endParaRPr lang="ru-RU" sz="3600">
+            <a:endParaRPr lang="ru-RU">
               <a:solidFill>
                 <a:schemeClr val="tx1">
                   <a:lumMod val="95000"/>
@@ -3919,7 +3787,7 @@
           </a:p>
           <a:p>
             <a:r>
-              <a:rPr lang="ru-RU" sz="3600">
+              <a:rPr lang="ru-RU">
                 <a:solidFill>
                   <a:schemeClr val="tx1">
                     <a:lumMod val="95000"/>
@@ -3931,7 +3799,7 @@
               <a:t>       </a:t>
             </a:r>
             <a:r>
-              <a:rPr lang="ru-RU" sz="3600">
+              <a:rPr lang="ru-RU">
                 <a:solidFill>
                   <a:schemeClr val="tx1">
                     <a:lumMod val="95000"/>
@@ -3943,7 +3811,7 @@
               <a:t>1.1)</a:t>
             </a:r>
             <a:r>
-              <a:rPr lang="en-US" sz="3600">
+              <a:rPr lang="en-US">
                 <a:solidFill>
                   <a:schemeClr val="tx1">
                     <a:lumMod val="95000"/>
@@ -3955,7 +3823,7 @@
               <a:t> </a:t>
             </a:r>
             <a:r>
-              <a:rPr lang="ru-RU" sz="3600">
+              <a:rPr lang="ru-RU">
                 <a:solidFill>
                   <a:schemeClr val="tx1">
                     <a:lumMod val="95000"/>
@@ -3969,7 +3837,7 @@
           </a:p>
           <a:p>
             <a:r>
-              <a:rPr lang="ru-RU" sz="3600">
+              <a:rPr lang="ru-RU">
                 <a:solidFill>
                   <a:schemeClr val="tx1">
                     <a:lumMod val="95000"/>
@@ -3980,7 +3848,42 @@
               </a:rPr>
               <a:t>       1.2) Описание нефункциональных требований</a:t>
             </a:r>
-            <a:endParaRPr lang="ru-RU" sz="3600">
+            <a:br>
+              <a:rPr lang="en-US">
+                <a:solidFill>
+                  <a:schemeClr val="tx1">
+                    <a:lumMod val="95000"/>
+                    <a:lumOff val="5000"/>
+                  </a:schemeClr>
+                </a:solidFill>
+                <a:latin typeface="VTB Group UI Book" panose="020B0503040504020204" pitchFamily="34" charset="-52"/>
+              </a:rPr>
+            </a:br>
+            <a:r>
+              <a:rPr lang="en-US">
+                <a:solidFill>
+                  <a:schemeClr val="tx1">
+                    <a:lumMod val="95000"/>
+                    <a:lumOff val="5000"/>
+                  </a:schemeClr>
+                </a:solidFill>
+                <a:latin typeface="VTB Group UI Book" panose="020B0503040504020204" pitchFamily="34" charset="-52"/>
+              </a:rPr>
+              <a:t>       1.3) </a:t>
+            </a:r>
+            <a:r>
+              <a:rPr lang="ru-RU">
+                <a:solidFill>
+                  <a:schemeClr val="tx1">
+                    <a:lumMod val="95000"/>
+                    <a:lumOff val="5000"/>
+                  </a:schemeClr>
+                </a:solidFill>
+                <a:latin typeface="VTB Group UI Book" panose="020B0503040504020204" pitchFamily="34" charset="-52"/>
+              </a:rPr>
+              <a:t>Составление перечня планируемого инструментария, описание их назначения</a:t>
+            </a:r>
+            <a:endParaRPr lang="ru-RU">
               <a:solidFill>
                 <a:schemeClr val="tx1">
                   <a:lumMod val="95000"/>
@@ -3991,11 +3894,8 @@
             </a:endParaRPr>
           </a:p>
           <a:p>
-            <a:pPr marL="742950" indent="-742950">
-              <a:buAutoNum type="arabicParenR" startAt="2"/>
-            </a:pPr>
-            <a:r>
-              <a:rPr lang="ru-RU" sz="3600">
+            <a:r>
+              <a:rPr lang="ru-RU">
                 <a:solidFill>
                   <a:schemeClr val="tx1">
                     <a:lumMod val="95000"/>
@@ -4004,10 +3904,10 @@
                 </a:solidFill>
                 <a:latin typeface="VTB Group UI Semi Bold" panose="020B0603050504020204" pitchFamily="34" charset="-52"/>
               </a:rPr>
-              <a:t>Проектирование</a:t>
-            </a:r>
-            <a:r>
-              <a:rPr lang="en-US" sz="3600">
+              <a:t>2)   Проектирование</a:t>
+            </a:r>
+            <a:r>
+              <a:rPr lang="en-US">
                 <a:solidFill>
                   <a:schemeClr val="tx1">
                     <a:lumMod val="95000"/>
@@ -4021,7 +3921,7 @@
           </a:p>
           <a:p>
             <a:r>
-              <a:rPr lang="en-US" sz="3600">
+              <a:rPr lang="en-US">
                 <a:solidFill>
                   <a:schemeClr val="tx1">
                     <a:lumMod val="95000"/>
@@ -4033,7 +3933,7 @@
               <a:t>       </a:t>
             </a:r>
             <a:r>
-              <a:rPr lang="ru-RU" sz="3600">
+              <a:rPr lang="ru-RU">
                 <a:solidFill>
                   <a:schemeClr val="tx1">
                     <a:lumMod val="95000"/>
@@ -4045,7 +3945,7 @@
               <a:t>2.1) Создание </a:t>
             </a:r>
             <a:r>
-              <a:rPr lang="en-US" sz="3600">
+              <a:rPr lang="en-US">
                 <a:solidFill>
                   <a:schemeClr val="tx1">
                     <a:lumMod val="95000"/>
@@ -4057,7 +3957,7 @@
               <a:t>UI Kit’</a:t>
             </a:r>
             <a:r>
-              <a:rPr lang="ru-RU" sz="3600">
+              <a:rPr lang="ru-RU">
                 <a:solidFill>
                   <a:schemeClr val="tx1">
                     <a:lumMod val="95000"/>
@@ -4069,7 +3969,7 @@
               <a:t>а в </a:t>
             </a:r>
             <a:r>
-              <a:rPr lang="en-US" sz="3600">
+              <a:rPr lang="en-US">
                 <a:solidFill>
                   <a:schemeClr val="tx1">
                     <a:lumMod val="95000"/>
@@ -4081,7 +3981,7 @@
               <a:t>Figma</a:t>
             </a:r>
             <a:br>
-              <a:rPr lang="ru-RU" sz="3600">
+              <a:rPr lang="ru-RU">
                 <a:solidFill>
                   <a:schemeClr val="tx1">
                     <a:lumMod val="95000"/>
@@ -4092,7 +3992,7 @@
               </a:rPr>
             </a:br>
             <a:r>
-              <a:rPr lang="ru-RU" sz="3600">
+              <a:rPr lang="ru-RU">
                 <a:solidFill>
                   <a:schemeClr val="tx1">
                     <a:lumMod val="95000"/>
@@ -4104,7 +4004,7 @@
               <a:t>       2.2) Описание сценариев пользовательских маршрутов (</a:t>
             </a:r>
             <a:r>
-              <a:rPr lang="en-US" sz="3600">
+              <a:rPr lang="en-US">
                 <a:solidFill>
                   <a:schemeClr val="tx1">
                     <a:lumMod val="95000"/>
@@ -4116,7 +4016,7 @@
               <a:t>User Flow</a:t>
             </a:r>
             <a:r>
-              <a:rPr lang="ru-RU" sz="3600">
+              <a:rPr lang="ru-RU">
                 <a:solidFill>
                   <a:schemeClr val="tx1">
                     <a:lumMod val="95000"/>
@@ -4128,7 +4028,7 @@
               <a:t>)</a:t>
             </a:r>
             <a:br>
-              <a:rPr lang="ru-RU" sz="3600">
+              <a:rPr lang="ru-RU">
                 <a:solidFill>
                   <a:schemeClr val="tx1">
                     <a:lumMod val="95000"/>
@@ -4139,7 +4039,7 @@
               </a:rPr>
             </a:br>
             <a:r>
-              <a:rPr lang="ru-RU" sz="3600">
+              <a:rPr lang="ru-RU">
                 <a:solidFill>
                   <a:schemeClr val="tx1">
                     <a:lumMod val="95000"/>
@@ -4151,7 +4051,7 @@
               <a:t>       2.3) Макетирование </a:t>
             </a:r>
             <a:r>
-              <a:rPr lang="en-US" sz="3600">
+              <a:rPr lang="en-US">
                 <a:solidFill>
                   <a:schemeClr val="tx1">
                     <a:lumMod val="95000"/>
@@ -4162,7 +4062,203 @@
               </a:rPr>
               <a:t>User Flow</a:t>
             </a:r>
-            <a:endParaRPr lang="ru-RU" sz="3600">
+            <a:endParaRPr lang="ru-RU">
+              <a:solidFill>
+                <a:schemeClr val="tx1">
+                  <a:lumMod val="95000"/>
+                  <a:lumOff val="5000"/>
+                </a:schemeClr>
+              </a:solidFill>
+              <a:latin typeface="VTB Group UI Semi Bold" panose="020B0603050504020204" pitchFamily="34" charset="-52"/>
+            </a:endParaRPr>
+          </a:p>
+          <a:p>
+            <a:r>
+              <a:rPr lang="ru-RU">
+                <a:solidFill>
+                  <a:schemeClr val="tx1">
+                    <a:lumMod val="95000"/>
+                    <a:lumOff val="5000"/>
+                  </a:schemeClr>
+                </a:solidFill>
+                <a:latin typeface="VTB Group UI Semi Bold" panose="020B0603050504020204" pitchFamily="34" charset="-52"/>
+              </a:rPr>
+              <a:t>3)   Разработка</a:t>
+            </a:r>
+            <a:r>
+              <a:rPr lang="en-US">
+                <a:solidFill>
+                  <a:schemeClr val="tx1">
+                    <a:lumMod val="95000"/>
+                    <a:lumOff val="5000"/>
+                  </a:schemeClr>
+                </a:solidFill>
+                <a:latin typeface="VTB Group UI Semi Bold" panose="020B0603050504020204" pitchFamily="34" charset="-52"/>
+              </a:rPr>
+              <a:t>:</a:t>
+            </a:r>
+          </a:p>
+          <a:p>
+            <a:r>
+              <a:rPr lang="en-US">
+                <a:solidFill>
+                  <a:schemeClr val="tx1">
+                    <a:lumMod val="95000"/>
+                    <a:lumOff val="5000"/>
+                  </a:schemeClr>
+                </a:solidFill>
+                <a:latin typeface="VTB Group UI Semi Bold" panose="020B0603050504020204" pitchFamily="34" charset="-52"/>
+              </a:rPr>
+              <a:t>       </a:t>
+            </a:r>
+            <a:r>
+              <a:rPr lang="en-US">
+                <a:solidFill>
+                  <a:schemeClr val="tx1">
+                    <a:lumMod val="95000"/>
+                    <a:lumOff val="5000"/>
+                  </a:schemeClr>
+                </a:solidFill>
+                <a:latin typeface="VTB Group UI Book" panose="020B0503040504020204" pitchFamily="34" charset="-52"/>
+              </a:rPr>
+              <a:t>3</a:t>
+            </a:r>
+            <a:r>
+              <a:rPr lang="ru-RU">
+                <a:solidFill>
+                  <a:schemeClr val="tx1">
+                    <a:lumMod val="95000"/>
+                    <a:lumOff val="5000"/>
+                  </a:schemeClr>
+                </a:solidFill>
+                <a:latin typeface="VTB Group UI Book" panose="020B0503040504020204" pitchFamily="34" charset="-52"/>
+              </a:rPr>
+              <a:t>.1) Создание кастомной библитеки </a:t>
+            </a:r>
+            <a:r>
+              <a:rPr lang="en-US">
+                <a:solidFill>
+                  <a:schemeClr val="tx1">
+                    <a:lumMod val="95000"/>
+                    <a:lumOff val="5000"/>
+                  </a:schemeClr>
+                </a:solidFill>
+                <a:latin typeface="VTB Group UI Book" panose="020B0503040504020204" pitchFamily="34" charset="-52"/>
+              </a:rPr>
+              <a:t>UI</a:t>
+            </a:r>
+            <a:r>
+              <a:rPr lang="ru-RU">
+                <a:solidFill>
+                  <a:schemeClr val="tx1">
+                    <a:lumMod val="95000"/>
+                    <a:lumOff val="5000"/>
+                  </a:schemeClr>
+                </a:solidFill>
+                <a:latin typeface="VTB Group UI Book" panose="020B0503040504020204" pitchFamily="34" charset="-52"/>
+              </a:rPr>
+              <a:t>-компонентов в </a:t>
+            </a:r>
+            <a:r>
+              <a:rPr lang="en-US">
+                <a:solidFill>
+                  <a:schemeClr val="tx1">
+                    <a:lumMod val="95000"/>
+                    <a:lumOff val="5000"/>
+                  </a:schemeClr>
+                </a:solidFill>
+                <a:latin typeface="VTB Group UI Book" panose="020B0503040504020204" pitchFamily="34" charset="-52"/>
+              </a:rPr>
+              <a:t>React</a:t>
+            </a:r>
+            <a:br>
+              <a:rPr lang="ru-RU">
+                <a:solidFill>
+                  <a:schemeClr val="tx1">
+                    <a:lumMod val="95000"/>
+                    <a:lumOff val="5000"/>
+                  </a:schemeClr>
+                </a:solidFill>
+                <a:latin typeface="VTB Group UI Book" panose="020B0503040504020204" pitchFamily="34" charset="-52"/>
+              </a:rPr>
+            </a:br>
+            <a:r>
+              <a:rPr lang="ru-RU">
+                <a:solidFill>
+                  <a:schemeClr val="tx1">
+                    <a:lumMod val="95000"/>
+                    <a:lumOff val="5000"/>
+                  </a:schemeClr>
+                </a:solidFill>
+                <a:latin typeface="VTB Group UI Book" panose="020B0503040504020204" pitchFamily="34" charset="-52"/>
+              </a:rPr>
+              <a:t>       </a:t>
+            </a:r>
+            <a:r>
+              <a:rPr lang="en-US">
+                <a:solidFill>
+                  <a:schemeClr val="tx1">
+                    <a:lumMod val="95000"/>
+                    <a:lumOff val="5000"/>
+                  </a:schemeClr>
+                </a:solidFill>
+                <a:latin typeface="VTB Group UI Book" panose="020B0503040504020204" pitchFamily="34" charset="-52"/>
+              </a:rPr>
+              <a:t>3</a:t>
+            </a:r>
+            <a:r>
+              <a:rPr lang="ru-RU">
+                <a:solidFill>
+                  <a:schemeClr val="tx1">
+                    <a:lumMod val="95000"/>
+                    <a:lumOff val="5000"/>
+                  </a:schemeClr>
+                </a:solidFill>
+                <a:latin typeface="VTB Group UI Book" panose="020B0503040504020204" pitchFamily="34" charset="-52"/>
+              </a:rPr>
+              <a:t>.2)</a:t>
+            </a:r>
+            <a:r>
+              <a:rPr lang="en-US">
+                <a:solidFill>
+                  <a:schemeClr val="tx1">
+                    <a:lumMod val="95000"/>
+                    <a:lumOff val="5000"/>
+                  </a:schemeClr>
+                </a:solidFill>
+                <a:latin typeface="VTB Group UI Book" panose="020B0503040504020204" pitchFamily="34" charset="-52"/>
+              </a:rPr>
+              <a:t> </a:t>
+            </a:r>
+            <a:r>
+              <a:rPr lang="ru-RU">
+                <a:solidFill>
+                  <a:schemeClr val="tx1">
+                    <a:lumMod val="95000"/>
+                    <a:lumOff val="5000"/>
+                  </a:schemeClr>
+                </a:solidFill>
+                <a:latin typeface="VTB Group UI Book" panose="020B0503040504020204" pitchFamily="34" charset="-52"/>
+              </a:rPr>
+              <a:t>Развертка тестового стенда</a:t>
+            </a:r>
+          </a:p>
+          <a:p>
+            <a:r>
+              <a:rPr lang="ru-RU">
+                <a:solidFill>
+                  <a:schemeClr val="tx1">
+                    <a:lumMod val="95000"/>
+                    <a:lumOff val="5000"/>
+                  </a:schemeClr>
+                </a:solidFill>
+                <a:latin typeface="VTB Group UI Semi Bold" panose="020B0603050504020204" pitchFamily="34" charset="-52"/>
+              </a:rPr>
+              <a:t>4) …</a:t>
+            </a:r>
+          </a:p>
+          <a:p>
+            <a:endParaRPr lang="ru-RU">
               <a:solidFill>
                 <a:schemeClr val="tx1">
                   <a:lumMod val="95000"/>
@@ -4195,7 +4291,7 @@
         <p:cNvPr id="1" name="">
           <a:extLst>
             <a:ext uri="{FF2B5EF4-FFF2-40B4-BE49-F238E27FC236}">
-              <a16:creationId xmlns:a16="http://schemas.microsoft.com/office/drawing/2014/main" id="{FA1AFE1F-3FAD-07A7-82C1-834F8EA4CD3C}"/>
+              <a16:creationId xmlns:a16="http://schemas.microsoft.com/office/drawing/2014/main" id="{9245AD0C-DE16-7845-93A2-10B69CD5E17B}"/>
             </a:ext>
           </a:extLst>
         </p:cNvPr>
@@ -4215,7 +4311,7 @@
           <p:cNvPr id="5" name="TextBox 4">
             <a:extLst>
               <a:ext uri="{FF2B5EF4-FFF2-40B4-BE49-F238E27FC236}">
-                <a16:creationId xmlns:a16="http://schemas.microsoft.com/office/drawing/2014/main" id="{2F951945-F5D0-03D7-34C9-CECA94B4F551}"/>
+                <a16:creationId xmlns:a16="http://schemas.microsoft.com/office/drawing/2014/main" id="{57550A58-FFC6-43B0-1AE1-7EE47A016410}"/>
               </a:ext>
             </a:extLst>
           </p:cNvPr>
@@ -4254,12 +4350,439 @@
           </a:p>
         </p:txBody>
       </p:sp>
+      <p:graphicFrame>
+        <p:nvGraphicFramePr>
+          <p:cNvPr id="2" name="Таблица 1">
+            <a:extLst>
+              <a:ext uri="{FF2B5EF4-FFF2-40B4-BE49-F238E27FC236}">
+                <a16:creationId xmlns:a16="http://schemas.microsoft.com/office/drawing/2014/main" id="{B36205F3-E636-C5C8-6F4F-599DB0F79BA1}"/>
+              </a:ext>
+            </a:extLst>
+          </p:cNvPr>
+          <p:cNvGraphicFramePr>
+            <a:graphicFrameLocks noGrp="1"/>
+          </p:cNvGraphicFramePr>
+          <p:nvPr>
+            <p:extLst>
+              <p:ext uri="{D42A27DB-BD31-4B8C-83A1-F6EECF244321}">
+                <p14:modId xmlns:p14="http://schemas.microsoft.com/office/powerpoint/2010/main" val="2325652521"/>
+              </p:ext>
+            </p:extLst>
+          </p:nvPr>
+        </p:nvGraphicFramePr>
+        <p:xfrm>
+          <a:off x="534295" y="1453313"/>
+          <a:ext cx="11261464" cy="2148473"/>
+        </p:xfrm>
+        <a:graphic>
+          <a:graphicData uri="http://schemas.openxmlformats.org/drawingml/2006/table">
+            <a:tbl>
+              <a:tblPr firstRow="1" bandRow="1">
+                <a:tableStyleId>{7E9639D4-E3E2-4D34-9284-5A2195B3D0D7}</a:tableStyleId>
+              </a:tblPr>
+              <a:tblGrid>
+                <a:gridCol w="5630732">
+                  <a:extLst>
+                    <a:ext uri="{9D8B030D-6E8A-4147-A177-3AD203B41FA5}">
+                      <a16:colId xmlns:a16="http://schemas.microsoft.com/office/drawing/2014/main" val="1316740329"/>
+                    </a:ext>
+                  </a:extLst>
+                </a:gridCol>
+                <a:gridCol w="5630732">
+                  <a:extLst>
+                    <a:ext uri="{9D8B030D-6E8A-4147-A177-3AD203B41FA5}">
+                      <a16:colId xmlns:a16="http://schemas.microsoft.com/office/drawing/2014/main" val="3952294350"/>
+                    </a:ext>
+                  </a:extLst>
+                </a:gridCol>
+              </a:tblGrid>
+              <a:tr h="481813">
+                <a:tc>
+                  <a:txBody>
+                    <a:bodyPr/>
+                    <a:lstStyle/>
+                    <a:p>
+                      <a:pPr algn="ctr"/>
+                      <a:r>
+                        <a:rPr lang="ru-RU">
+                          <a:latin typeface="VTB Group UI Semi Bold" panose="020B0603050504020204" pitchFamily="34" charset="-52"/>
+                        </a:rPr>
+                        <a:t>Этап</a:t>
+                      </a:r>
+                    </a:p>
+                  </a:txBody>
+                  <a:tcPr>
+                    <a:lnL w="12700" cap="flat" cmpd="sng" algn="ctr">
+                      <a:solidFill>
+                        <a:schemeClr val="tx1"/>
+                      </a:solidFill>
+                      <a:prstDash val="solid"/>
+                      <a:round/>
+                      <a:headEnd type="none" w="med" len="med"/>
+                      <a:tailEnd type="none" w="med" len="med"/>
+                    </a:lnL>
+                    <a:lnR w="12700" cap="flat" cmpd="sng" algn="ctr">
+                      <a:solidFill>
+                        <a:schemeClr val="tx1"/>
+                      </a:solidFill>
+                      <a:prstDash val="solid"/>
+                      <a:round/>
+                      <a:headEnd type="none" w="med" len="med"/>
+                      <a:tailEnd type="none" w="med" len="med"/>
+                    </a:lnR>
+                    <a:lnT w="12700" cap="flat" cmpd="sng" algn="ctr">
+                      <a:solidFill>
+                        <a:schemeClr val="tx1"/>
+                      </a:solidFill>
+                      <a:prstDash val="solid"/>
+                      <a:round/>
+                      <a:headEnd type="none" w="med" len="med"/>
+                      <a:tailEnd type="none" w="med" len="med"/>
+                    </a:lnT>
+                    <a:lnB w="12700" cap="flat" cmpd="sng" algn="ctr">
+                      <a:solidFill>
+                        <a:schemeClr val="tx1"/>
+                      </a:solidFill>
+                      <a:prstDash val="solid"/>
+                      <a:round/>
+                      <a:headEnd type="none" w="med" len="med"/>
+                      <a:tailEnd type="none" w="med" len="med"/>
+                    </a:lnB>
+                    <a:solidFill>
+                      <a:srgbClr val="0062FF"/>
+                    </a:solidFill>
+                  </a:tcPr>
+                </a:tc>
+                <a:tc>
+                  <a:txBody>
+                    <a:bodyPr/>
+                    <a:lstStyle/>
+                    <a:p>
+                      <a:pPr algn="ctr"/>
+                      <a:r>
+                        <a:rPr lang="ru-RU">
+                          <a:latin typeface="VTB Group UI Semi Bold" panose="020B0603050504020204" pitchFamily="34" charset="-52"/>
+                        </a:rPr>
+                        <a:t>Ориентировочный срок</a:t>
+                      </a:r>
+                    </a:p>
+                  </a:txBody>
+                  <a:tcPr>
+                    <a:lnL w="12700" cap="flat" cmpd="sng" algn="ctr">
+                      <a:solidFill>
+                        <a:schemeClr val="tx1"/>
+                      </a:solidFill>
+                      <a:prstDash val="solid"/>
+                      <a:round/>
+                      <a:headEnd type="none" w="med" len="med"/>
+                      <a:tailEnd type="none" w="med" len="med"/>
+                    </a:lnL>
+                    <a:lnR w="12700" cap="flat" cmpd="sng" algn="ctr">
+                      <a:solidFill>
+                        <a:schemeClr val="tx1"/>
+                      </a:solidFill>
+                      <a:prstDash val="solid"/>
+                      <a:round/>
+                      <a:headEnd type="none" w="med" len="med"/>
+                      <a:tailEnd type="none" w="med" len="med"/>
+                    </a:lnR>
+                    <a:lnT w="12700" cap="flat" cmpd="sng" algn="ctr">
+                      <a:solidFill>
+                        <a:schemeClr val="tx1"/>
+                      </a:solidFill>
+                      <a:prstDash val="solid"/>
+                      <a:round/>
+                      <a:headEnd type="none" w="med" len="med"/>
+                      <a:tailEnd type="none" w="med" len="med"/>
+                    </a:lnT>
+                    <a:lnB w="12700" cap="flat" cmpd="sng" algn="ctr">
+                      <a:solidFill>
+                        <a:schemeClr val="tx1"/>
+                      </a:solidFill>
+                      <a:prstDash val="solid"/>
+                      <a:round/>
+                      <a:headEnd type="none" w="med" len="med"/>
+                      <a:tailEnd type="none" w="med" len="med"/>
+                    </a:lnB>
+                    <a:solidFill>
+                      <a:srgbClr val="0062FF"/>
+                    </a:solidFill>
+                  </a:tcPr>
+                </a:tc>
+                <a:extLst>
+                  <a:ext uri="{0D108BD9-81ED-4DB2-BD59-A6C34878D82A}">
+                    <a16:rowId xmlns:a16="http://schemas.microsoft.com/office/drawing/2014/main" val="3901080250"/>
+                  </a:ext>
+                </a:extLst>
+              </a:tr>
+              <a:tr h="833330">
+                <a:tc>
+                  <a:txBody>
+                    <a:bodyPr/>
+                    <a:lstStyle/>
+                    <a:p>
+                      <a:pPr algn="l"/>
+                      <a:endParaRPr lang="ru-RU">
+                        <a:latin typeface="VTB Group UI Book" panose="020B0503040504020204" pitchFamily="34" charset="-52"/>
+                      </a:endParaRPr>
+                    </a:p>
+                  </a:txBody>
+                  <a:tcPr marL="182880" anchor="ctr">
+                    <a:lnL w="12700" cap="flat" cmpd="sng" algn="ctr">
+                      <a:solidFill>
+                        <a:schemeClr val="tx1"/>
+                      </a:solidFill>
+                      <a:prstDash val="solid"/>
+                      <a:round/>
+                      <a:headEnd type="none" w="med" len="med"/>
+                      <a:tailEnd type="none" w="med" len="med"/>
+                    </a:lnL>
+                    <a:lnR w="12700" cap="flat" cmpd="sng" algn="ctr">
+                      <a:solidFill>
+                        <a:schemeClr val="tx1"/>
+                      </a:solidFill>
+                      <a:prstDash val="solid"/>
+                      <a:round/>
+                      <a:headEnd type="none" w="med" len="med"/>
+                      <a:tailEnd type="none" w="med" len="med"/>
+                    </a:lnR>
+                    <a:lnT w="12700" cap="flat" cmpd="sng" algn="ctr">
+                      <a:solidFill>
+                        <a:schemeClr val="tx1"/>
+                      </a:solidFill>
+                      <a:prstDash val="solid"/>
+                      <a:round/>
+                      <a:headEnd type="none" w="med" len="med"/>
+                      <a:tailEnd type="none" w="med" len="med"/>
+                    </a:lnT>
+                    <a:lnB w="12700" cap="flat" cmpd="sng" algn="ctr">
+                      <a:solidFill>
+                        <a:schemeClr val="tx1"/>
+                      </a:solidFill>
+                      <a:prstDash val="solid"/>
+                      <a:round/>
+                      <a:headEnd type="none" w="med" len="med"/>
+                      <a:tailEnd type="none" w="med" len="med"/>
+                    </a:lnB>
+                  </a:tcPr>
+                </a:tc>
+                <a:tc>
+                  <a:txBody>
+                    <a:bodyPr/>
+                    <a:lstStyle/>
+                    <a:p>
+                      <a:pPr algn="ctr"/>
+                      <a:endParaRPr lang="ru-RU">
+                        <a:latin typeface="VTB Group UI Book" panose="020B0503040504020204" pitchFamily="34" charset="-52"/>
+                      </a:endParaRPr>
+                    </a:p>
+                  </a:txBody>
+                  <a:tcPr anchor="ctr">
+                    <a:lnL w="12700" cap="flat" cmpd="sng" algn="ctr">
+                      <a:solidFill>
+                        <a:schemeClr val="tx1"/>
+                      </a:solidFill>
+                      <a:prstDash val="solid"/>
+                      <a:round/>
+                      <a:headEnd type="none" w="med" len="med"/>
+                      <a:tailEnd type="none" w="med" len="med"/>
+                    </a:lnL>
+                    <a:lnR w="12700" cap="flat" cmpd="sng" algn="ctr">
+                      <a:solidFill>
+                        <a:schemeClr val="tx1"/>
+                      </a:solidFill>
+                      <a:prstDash val="solid"/>
+                      <a:round/>
+                      <a:headEnd type="none" w="med" len="med"/>
+                      <a:tailEnd type="none" w="med" len="med"/>
+                    </a:lnR>
+                    <a:lnT w="12700" cap="flat" cmpd="sng" algn="ctr">
+                      <a:solidFill>
+                        <a:schemeClr val="tx1"/>
+                      </a:solidFill>
+                      <a:prstDash val="solid"/>
+                      <a:round/>
+                      <a:headEnd type="none" w="med" len="med"/>
+                      <a:tailEnd type="none" w="med" len="med"/>
+                    </a:lnT>
+                    <a:lnB w="12700" cap="flat" cmpd="sng" algn="ctr">
+                      <a:solidFill>
+                        <a:schemeClr val="tx1"/>
+                      </a:solidFill>
+                      <a:prstDash val="solid"/>
+                      <a:round/>
+                      <a:headEnd type="none" w="med" len="med"/>
+                      <a:tailEnd type="none" w="med" len="med"/>
+                    </a:lnB>
+                  </a:tcPr>
+                </a:tc>
+                <a:extLst>
+                  <a:ext uri="{0D108BD9-81ED-4DB2-BD59-A6C34878D82A}">
+                    <a16:rowId xmlns:a16="http://schemas.microsoft.com/office/drawing/2014/main" val="1306159448"/>
+                  </a:ext>
+                </a:extLst>
+              </a:tr>
+              <a:tr h="833330">
+                <a:tc>
+                  <a:txBody>
+                    <a:bodyPr/>
+                    <a:lstStyle/>
+                    <a:p>
+                      <a:pPr algn="l"/>
+                      <a:endParaRPr lang="ru-RU">
+                        <a:latin typeface="VTB Group UI Book" panose="020B0503040504020204" pitchFamily="34" charset="-52"/>
+                      </a:endParaRPr>
+                    </a:p>
+                  </a:txBody>
+                  <a:tcPr marL="182880" anchor="ctr">
+                    <a:lnL w="12700" cap="flat" cmpd="sng" algn="ctr">
+                      <a:solidFill>
+                        <a:schemeClr val="tx1"/>
+                      </a:solidFill>
+                      <a:prstDash val="solid"/>
+                      <a:round/>
+                      <a:headEnd type="none" w="med" len="med"/>
+                      <a:tailEnd type="none" w="med" len="med"/>
+                    </a:lnL>
+                    <a:lnR w="12700" cap="flat" cmpd="sng" algn="ctr">
+                      <a:solidFill>
+                        <a:schemeClr val="tx1"/>
+                      </a:solidFill>
+                      <a:prstDash val="solid"/>
+                      <a:round/>
+                      <a:headEnd type="none" w="med" len="med"/>
+                      <a:tailEnd type="none" w="med" len="med"/>
+                    </a:lnR>
+                    <a:lnT w="12700" cap="flat" cmpd="sng" algn="ctr">
+                      <a:solidFill>
+                        <a:schemeClr val="tx1"/>
+                      </a:solidFill>
+                      <a:prstDash val="solid"/>
+                      <a:round/>
+                      <a:headEnd type="none" w="med" len="med"/>
+                      <a:tailEnd type="none" w="med" len="med"/>
+                    </a:lnT>
+                    <a:lnB w="12700" cap="flat" cmpd="sng" algn="ctr">
+                      <a:solidFill>
+                        <a:schemeClr val="tx1"/>
+                      </a:solidFill>
+                      <a:prstDash val="solid"/>
+                      <a:round/>
+                      <a:headEnd type="none" w="med" len="med"/>
+                      <a:tailEnd type="none" w="med" len="med"/>
+                    </a:lnB>
+                  </a:tcPr>
+                </a:tc>
+                <a:tc>
+                  <a:txBody>
+                    <a:bodyPr/>
+                    <a:lstStyle/>
+                    <a:p>
+                      <a:pPr algn="ctr"/>
+                      <a:endParaRPr lang="ru-RU">
+                        <a:latin typeface="VTB Group UI Book" panose="020B0503040504020204" pitchFamily="34" charset="-52"/>
+                      </a:endParaRPr>
+                    </a:p>
+                  </a:txBody>
+                  <a:tcPr anchor="ctr">
+                    <a:lnL w="12700" cap="flat" cmpd="sng" algn="ctr">
+                      <a:solidFill>
+                        <a:schemeClr val="tx1"/>
+                      </a:solidFill>
+                      <a:prstDash val="solid"/>
+                      <a:round/>
+                      <a:headEnd type="none" w="med" len="med"/>
+                      <a:tailEnd type="none" w="med" len="med"/>
+                    </a:lnL>
+                    <a:lnR w="12700" cap="flat" cmpd="sng" algn="ctr">
+                      <a:solidFill>
+                        <a:schemeClr val="tx1"/>
+                      </a:solidFill>
+                      <a:prstDash val="solid"/>
+                      <a:round/>
+                      <a:headEnd type="none" w="med" len="med"/>
+                      <a:tailEnd type="none" w="med" len="med"/>
+                    </a:lnR>
+                    <a:lnT w="12700" cap="flat" cmpd="sng" algn="ctr">
+                      <a:solidFill>
+                        <a:schemeClr val="tx1"/>
+                      </a:solidFill>
+                      <a:prstDash val="solid"/>
+                      <a:round/>
+                      <a:headEnd type="none" w="med" len="med"/>
+                      <a:tailEnd type="none" w="med" len="med"/>
+                    </a:lnT>
+                    <a:lnB w="12700" cap="flat" cmpd="sng" algn="ctr">
+                      <a:solidFill>
+                        <a:schemeClr val="tx1"/>
+                      </a:solidFill>
+                      <a:prstDash val="solid"/>
+                      <a:round/>
+                      <a:headEnd type="none" w="med" len="med"/>
+                      <a:tailEnd type="none" w="med" len="med"/>
+                    </a:lnB>
+                  </a:tcPr>
+                </a:tc>
+                <a:extLst>
+                  <a:ext uri="{0D108BD9-81ED-4DB2-BD59-A6C34878D82A}">
+                    <a16:rowId xmlns:a16="http://schemas.microsoft.com/office/drawing/2014/main" val="1610479619"/>
+                  </a:ext>
+                </a:extLst>
+              </a:tr>
+            </a:tbl>
+          </a:graphicData>
+        </a:graphic>
+      </p:graphicFrame>
+    </p:spTree>
+    <p:extLst>
+      <p:ext uri="{BB962C8B-B14F-4D97-AF65-F5344CB8AC3E}">
+        <p14:creationId xmlns:p14="http://schemas.microsoft.com/office/powerpoint/2010/main" val="73692638"/>
+      </p:ext>
+    </p:extLst>
+  </p:cSld>
+  <p:clrMapOvr>
+    <a:masterClrMapping/>
+  </p:clrMapOvr>
+</p:sld>
+</file>
+
+<file path=ppt/slides/slide2.xml><?xml version="1.0" encoding="utf-8"?>
+<p:sld xmlns:a="http://schemas.openxmlformats.org/drawingml/2006/main" xmlns:r="http://schemas.openxmlformats.org/officeDocument/2006/relationships" xmlns:p="http://schemas.openxmlformats.org/presentationml/2006/main">
+  <p:cSld>
+    <p:bg>
+      <p:bgPr>
+        <a:solidFill>
+          <a:srgbClr val="0062FF"/>
+        </a:solidFill>
+        <a:effectLst/>
+      </p:bgPr>
+    </p:bg>
+    <p:spTree>
+      <p:nvGrpSpPr>
+        <p:cNvPr id="1" name="">
+          <a:extLst>
+            <a:ext uri="{FF2B5EF4-FFF2-40B4-BE49-F238E27FC236}">
+              <a16:creationId xmlns:a16="http://schemas.microsoft.com/office/drawing/2014/main" id="{3E8B97A3-5D5F-E864-A63B-3BD2F24B19CC}"/>
+            </a:ext>
+          </a:extLst>
+        </p:cNvPr>
+        <p:cNvGrpSpPr/>
+        <p:nvPr/>
+      </p:nvGrpSpPr>
+      <p:grpSpPr>
+        <a:xfrm>
+          <a:off x="0" y="0"/>
+          <a:ext cx="0" cy="0"/>
+          <a:chOff x="0" y="0"/>
+          <a:chExt cx="0" cy="0"/>
+        </a:xfrm>
+      </p:grpSpPr>
       <p:sp>
         <p:nvSpPr>
-          <p:cNvPr id="13" name="TextBox 12">
+          <p:cNvPr id="3" name="Text 1">
             <a:extLst>
               <a:ext uri="{FF2B5EF4-FFF2-40B4-BE49-F238E27FC236}">
-                <a16:creationId xmlns:a16="http://schemas.microsoft.com/office/drawing/2014/main" id="{5F3D92DA-4BAC-6572-FBA7-8DDB8FBB48C4}"/>
+                <a16:creationId xmlns:a16="http://schemas.microsoft.com/office/drawing/2014/main" id="{B05BABAC-7334-6DB3-BD3A-9B51A694F9DB}"/>
               </a:ext>
             </a:extLst>
           </p:cNvPr>
@@ -4268,8 +4791,105 @@
         </p:nvSpPr>
         <p:spPr>
           <a:xfrm>
-            <a:off x="706543" y="1590905"/>
-            <a:ext cx="10916969" cy="3970318"/>
+            <a:off x="5808213" y="3817661"/>
+            <a:ext cx="5845071" cy="1330296"/>
+          </a:xfrm>
+          <a:prstGeom prst="rect">
+            <a:avLst/>
+          </a:prstGeom>
+          <a:noFill/>
+          <a:ln/>
+        </p:spPr>
+        <p:txBody>
+          <a:bodyPr wrap="square" lIns="0" tIns="0" rIns="0" bIns="0" rtlCol="0" anchor="t"/>
+          <a:lstStyle/>
+          <a:p>
+            <a:pPr marL="0" indent="0" algn="ctr">
+              <a:buNone/>
+            </a:pPr>
+            <a:r>
+              <a:rPr lang="ru-RU" sz="3600">
+                <a:solidFill>
+                  <a:schemeClr val="bg1"/>
+                </a:solidFill>
+                <a:latin typeface="VTB Group UI Book" panose="020B0503040504020204" pitchFamily="34" charset="-52"/>
+                <a:ea typeface="VTB Group UI Semi Bold" pitchFamily="34" charset="-122"/>
+                <a:cs typeface="VTB Group UI Semi Bold" pitchFamily="34" charset="-120"/>
+              </a:rPr>
+              <a:t>Общее рабочее место</a:t>
+            </a:r>
+            <a:endParaRPr lang="en-US" sz="3600" dirty="0">
+              <a:solidFill>
+                <a:schemeClr val="bg1"/>
+              </a:solidFill>
+              <a:latin typeface="VTB Group UI Book" panose="020B0503040504020204" pitchFamily="34" charset="-52"/>
+            </a:endParaRPr>
+          </a:p>
+        </p:txBody>
+      </p:sp>
+      <p:sp>
+        <p:nvSpPr>
+          <p:cNvPr id="17" name="Text 1">
+            <a:extLst>
+              <a:ext uri="{FF2B5EF4-FFF2-40B4-BE49-F238E27FC236}">
+                <a16:creationId xmlns:a16="http://schemas.microsoft.com/office/drawing/2014/main" id="{F008D2FF-D423-6859-77B9-DA374BD354BE}"/>
+              </a:ext>
+            </a:extLst>
+          </p:cNvPr>
+          <p:cNvSpPr txBox="1"/>
+          <p:nvPr/>
+        </p:nvSpPr>
+        <p:spPr>
+          <a:xfrm>
+            <a:off x="4042498" y="2592329"/>
+            <a:ext cx="4293427" cy="1673341"/>
+          </a:xfrm>
+          <a:prstGeom prst="rect">
+            <a:avLst/>
+          </a:prstGeom>
+          <a:noFill/>
+          <a:ln/>
+        </p:spPr>
+        <p:txBody>
+          <a:bodyPr wrap="square" lIns="0" tIns="0" rIns="0" bIns="0" rtlCol="0" anchor="t"/>
+          <a:lstStyle/>
+          <a:p>
+            <a:pPr marL="0" indent="0" algn="ctr">
+              <a:buNone/>
+            </a:pPr>
+            <a:r>
+              <a:rPr lang="ru-RU" sz="8000">
+                <a:solidFill>
+                  <a:schemeClr val="bg1"/>
+                </a:solidFill>
+                <a:latin typeface="VTB Group UI Semi Bold" pitchFamily="34" charset="0"/>
+              </a:rPr>
+              <a:t>Доска</a:t>
+            </a:r>
+            <a:endParaRPr lang="en-US" sz="8000" dirty="0">
+              <a:solidFill>
+                <a:schemeClr val="bg1"/>
+              </a:solidFill>
+            </a:endParaRPr>
+          </a:p>
+        </p:txBody>
+      </p:sp>
+      <p:sp>
+        <p:nvSpPr>
+          <p:cNvPr id="58" name="TextBox 57">
+            <a:extLst>
+              <a:ext uri="{FF2B5EF4-FFF2-40B4-BE49-F238E27FC236}">
+                <a16:creationId xmlns:a16="http://schemas.microsoft.com/office/drawing/2014/main" id="{13E0278D-BF6E-62E3-47EF-806252063EB4}"/>
+              </a:ext>
+            </a:extLst>
+          </p:cNvPr>
+          <p:cNvSpPr txBox="1"/>
+          <p:nvPr/>
+        </p:nvSpPr>
+        <p:spPr>
+          <a:xfrm>
+            <a:off x="5372278" y="2394009"/>
+            <a:ext cx="5579256" cy="646331"/>
           </a:xfrm>
           <a:prstGeom prst="rect">
             <a:avLst/>
@@ -4282,222 +4902,178 @@
           </a:bodyPr>
           <a:lstStyle/>
           <a:p>
-            <a:endParaRPr lang="ru-RU" sz="3600">
+            <a:pPr marL="0" indent="0" algn="ctr">
+              <a:buNone/>
+            </a:pPr>
+            <a:r>
+              <a:rPr lang="ru-RU" sz="3600">
+                <a:solidFill>
+                  <a:schemeClr val="bg1"/>
+                </a:solidFill>
+                <a:latin typeface="VTB Group UI Book" panose="020B0503040504020204" pitchFamily="34" charset="-52"/>
+              </a:rPr>
+              <a:t>Контекст</a:t>
+            </a:r>
+            <a:endParaRPr lang="en-US" sz="3600" dirty="0">
               <a:solidFill>
-                <a:schemeClr val="tx1">
-                  <a:lumMod val="95000"/>
-                  <a:lumOff val="5000"/>
-                </a:schemeClr>
-              </a:solidFill>
-              <a:latin typeface="VTB Group UI Semi Bold" panose="020B0603050504020204" pitchFamily="34" charset="-52"/>
-            </a:endParaRPr>
-          </a:p>
-          <a:p>
-            <a:pPr marL="742950" indent="-742950">
-              <a:buFont typeface="+mj-lt"/>
-              <a:buAutoNum type="arabicParenR" startAt="3"/>
-            </a:pPr>
-            <a:r>
-              <a:rPr lang="ru-RU" sz="3600">
-                <a:solidFill>
-                  <a:schemeClr val="tx1">
-                    <a:lumMod val="95000"/>
-                    <a:lumOff val="5000"/>
-                  </a:schemeClr>
-                </a:solidFill>
-                <a:latin typeface="VTB Group UI Semi Bold" panose="020B0603050504020204" pitchFamily="34" charset="-52"/>
-              </a:rPr>
-              <a:t>Разработка</a:t>
-            </a:r>
-            <a:r>
-              <a:rPr lang="en-US" sz="3600">
-                <a:solidFill>
-                  <a:schemeClr val="tx1">
-                    <a:lumMod val="95000"/>
-                    <a:lumOff val="5000"/>
-                  </a:schemeClr>
-                </a:solidFill>
-                <a:latin typeface="VTB Group UI Semi Bold" panose="020B0603050504020204" pitchFamily="34" charset="-52"/>
-              </a:rPr>
-              <a:t>:</a:t>
-            </a:r>
-          </a:p>
-          <a:p>
-            <a:r>
-              <a:rPr lang="en-US" sz="3600">
-                <a:solidFill>
-                  <a:schemeClr val="tx1">
-                    <a:lumMod val="95000"/>
-                    <a:lumOff val="5000"/>
-                  </a:schemeClr>
-                </a:solidFill>
-                <a:latin typeface="VTB Group UI Semi Bold" panose="020B0603050504020204" pitchFamily="34" charset="-52"/>
-              </a:rPr>
-              <a:t>       </a:t>
-            </a:r>
-            <a:r>
-              <a:rPr lang="en-US" sz="3600">
-                <a:solidFill>
-                  <a:schemeClr val="tx1">
-                    <a:lumMod val="95000"/>
-                    <a:lumOff val="5000"/>
-                  </a:schemeClr>
-                </a:solidFill>
-                <a:latin typeface="VTB Group UI Book" panose="020B0503040504020204" pitchFamily="34" charset="-52"/>
-              </a:rPr>
-              <a:t>3</a:t>
-            </a:r>
-            <a:r>
-              <a:rPr lang="ru-RU" sz="3600">
-                <a:solidFill>
-                  <a:schemeClr val="tx1">
-                    <a:lumMod val="95000"/>
-                    <a:lumOff val="5000"/>
-                  </a:schemeClr>
-                </a:solidFill>
-                <a:latin typeface="VTB Group UI Book" panose="020B0503040504020204" pitchFamily="34" charset="-52"/>
-              </a:rPr>
-              <a:t>.1) Создание кастомной библитеки </a:t>
-            </a:r>
-            <a:r>
-              <a:rPr lang="en-US" sz="3600">
-                <a:solidFill>
-                  <a:schemeClr val="tx1">
-                    <a:lumMod val="95000"/>
-                    <a:lumOff val="5000"/>
-                  </a:schemeClr>
-                </a:solidFill>
-                <a:latin typeface="VTB Group UI Book" panose="020B0503040504020204" pitchFamily="34" charset="-52"/>
-              </a:rPr>
-              <a:t>UI</a:t>
-            </a:r>
-            <a:r>
-              <a:rPr lang="ru-RU" sz="3600">
-                <a:solidFill>
-                  <a:schemeClr val="tx1">
-                    <a:lumMod val="95000"/>
-                    <a:lumOff val="5000"/>
-                  </a:schemeClr>
-                </a:solidFill>
-                <a:latin typeface="VTB Group UI Book" panose="020B0503040504020204" pitchFamily="34" charset="-52"/>
-              </a:rPr>
-              <a:t>-компонентов в </a:t>
-            </a:r>
-            <a:r>
-              <a:rPr lang="en-US" sz="3600">
-                <a:solidFill>
-                  <a:schemeClr val="tx1">
-                    <a:lumMod val="95000"/>
-                    <a:lumOff val="5000"/>
-                  </a:schemeClr>
-                </a:solidFill>
-                <a:latin typeface="VTB Group UI Book" panose="020B0503040504020204" pitchFamily="34" charset="-52"/>
-              </a:rPr>
-              <a:t>React</a:t>
-            </a:r>
-            <a:br>
-              <a:rPr lang="ru-RU" sz="3600">
-                <a:solidFill>
-                  <a:schemeClr val="tx1">
-                    <a:lumMod val="95000"/>
-                    <a:lumOff val="5000"/>
-                  </a:schemeClr>
-                </a:solidFill>
-                <a:latin typeface="VTB Group UI Book" panose="020B0503040504020204" pitchFamily="34" charset="-52"/>
-              </a:rPr>
-            </a:br>
-            <a:r>
-              <a:rPr lang="ru-RU" sz="3600">
-                <a:solidFill>
-                  <a:schemeClr val="tx1">
-                    <a:lumMod val="95000"/>
-                    <a:lumOff val="5000"/>
-                  </a:schemeClr>
-                </a:solidFill>
-                <a:latin typeface="VTB Group UI Book" panose="020B0503040504020204" pitchFamily="34" charset="-52"/>
-              </a:rPr>
-              <a:t>       </a:t>
-            </a:r>
-            <a:r>
-              <a:rPr lang="en-US" sz="3600">
-                <a:solidFill>
-                  <a:schemeClr val="tx1">
-                    <a:lumMod val="95000"/>
-                    <a:lumOff val="5000"/>
-                  </a:schemeClr>
-                </a:solidFill>
-                <a:latin typeface="VTB Group UI Book" panose="020B0503040504020204" pitchFamily="34" charset="-52"/>
-              </a:rPr>
-              <a:t>3</a:t>
-            </a:r>
-            <a:r>
-              <a:rPr lang="ru-RU" sz="3600">
-                <a:solidFill>
-                  <a:schemeClr val="tx1">
-                    <a:lumMod val="95000"/>
-                    <a:lumOff val="5000"/>
-                  </a:schemeClr>
-                </a:solidFill>
-                <a:latin typeface="VTB Group UI Book" panose="020B0503040504020204" pitchFamily="34" charset="-52"/>
-              </a:rPr>
-              <a:t>.2)</a:t>
-            </a:r>
-            <a:r>
-              <a:rPr lang="en-US" sz="3600">
-                <a:solidFill>
-                  <a:schemeClr val="tx1">
-                    <a:lumMod val="95000"/>
-                    <a:lumOff val="5000"/>
-                  </a:schemeClr>
-                </a:solidFill>
-                <a:latin typeface="VTB Group UI Book" panose="020B0503040504020204" pitchFamily="34" charset="-52"/>
-              </a:rPr>
-              <a:t> </a:t>
-            </a:r>
-            <a:r>
-              <a:rPr lang="ru-RU" sz="3600">
-                <a:solidFill>
-                  <a:schemeClr val="tx1">
-                    <a:lumMod val="95000"/>
-                    <a:lumOff val="5000"/>
-                  </a:schemeClr>
-                </a:solidFill>
-                <a:latin typeface="VTB Group UI Book" panose="020B0503040504020204" pitchFamily="34" charset="-52"/>
-              </a:rPr>
-              <a:t>Развертка тестового стенда</a:t>
-            </a:r>
-          </a:p>
-          <a:p>
-            <a:endParaRPr lang="ru-RU" sz="3600">
-              <a:solidFill>
-                <a:schemeClr val="tx1">
-                  <a:lumMod val="95000"/>
-                  <a:lumOff val="5000"/>
-                </a:schemeClr>
+                <a:schemeClr val="bg1"/>
               </a:solidFill>
               <a:latin typeface="VTB Group UI Book" panose="020B0503040504020204" pitchFamily="34" charset="-52"/>
             </a:endParaRPr>
           </a:p>
-          <a:p>
+        </p:txBody>
+      </p:sp>
+      <p:sp>
+        <p:nvSpPr>
+          <p:cNvPr id="60" name="TextBox 59">
+            <a:extLst>
+              <a:ext uri="{FF2B5EF4-FFF2-40B4-BE49-F238E27FC236}">
+                <a16:creationId xmlns:a16="http://schemas.microsoft.com/office/drawing/2014/main" id="{084719E8-4732-D611-9D96-10020505779F}"/>
+              </a:ext>
+            </a:extLst>
+          </p:cNvPr>
+          <p:cNvSpPr txBox="1"/>
+          <p:nvPr/>
+        </p:nvSpPr>
+        <p:spPr>
+          <a:xfrm>
+            <a:off x="1122799" y="2172977"/>
+            <a:ext cx="5579256" cy="646331"/>
+          </a:xfrm>
+          <a:prstGeom prst="rect">
+            <a:avLst/>
+          </a:prstGeom>
+          <a:noFill/>
+        </p:spPr>
+        <p:txBody>
+          <a:bodyPr wrap="square">
+            <a:spAutoFit/>
+          </a:bodyPr>
+          <a:lstStyle/>
+          <a:p>
+            <a:pPr marL="0" indent="0" algn="ctr">
+              <a:buNone/>
+            </a:pPr>
             <a:r>
               <a:rPr lang="ru-RU" sz="3600">
                 <a:solidFill>
-                  <a:schemeClr val="tx1">
-                    <a:lumMod val="95000"/>
-                    <a:lumOff val="5000"/>
-                  </a:schemeClr>
-                </a:solidFill>
-                <a:latin typeface="VTB Group UI Semi Bold" panose="020B0603050504020204" pitchFamily="34" charset="-52"/>
-              </a:rPr>
-              <a:t>4) …</a:t>
-            </a:r>
+                  <a:schemeClr val="bg1"/>
+                </a:solidFill>
+                <a:latin typeface="VTB Group UI Book" panose="020B0503040504020204" pitchFamily="34" charset="-52"/>
+              </a:rPr>
+              <a:t>Визуализация</a:t>
+            </a:r>
+            <a:endParaRPr lang="en-US" sz="3600" dirty="0">
+              <a:solidFill>
+                <a:schemeClr val="bg1"/>
+              </a:solidFill>
+              <a:latin typeface="VTB Group UI Book" panose="020B0503040504020204" pitchFamily="34" charset="-52"/>
+            </a:endParaRPr>
+          </a:p>
+        </p:txBody>
+      </p:sp>
+      <p:sp>
+        <p:nvSpPr>
+          <p:cNvPr id="2" name="TextBox 1">
+            <a:extLst>
+              <a:ext uri="{FF2B5EF4-FFF2-40B4-BE49-F238E27FC236}">
+                <a16:creationId xmlns:a16="http://schemas.microsoft.com/office/drawing/2014/main" id="{2DC6A061-0124-6083-44EB-479CC897435B}"/>
+              </a:ext>
+            </a:extLst>
+          </p:cNvPr>
+          <p:cNvSpPr txBox="1"/>
+          <p:nvPr/>
+        </p:nvSpPr>
+        <p:spPr>
+          <a:xfrm>
+            <a:off x="1122799" y="3494495"/>
+            <a:ext cx="5132958" cy="646331"/>
+          </a:xfrm>
+          <a:prstGeom prst="rect">
+            <a:avLst/>
+          </a:prstGeom>
+          <a:noFill/>
+        </p:spPr>
+        <p:txBody>
+          <a:bodyPr wrap="square">
+            <a:spAutoFit/>
+          </a:bodyPr>
+          <a:lstStyle/>
+          <a:p>
+            <a:pPr marL="0" indent="0" algn="ctr">
+              <a:buNone/>
+            </a:pPr>
+            <a:r>
+              <a:rPr lang="ru-RU" sz="3600">
+                <a:solidFill>
+                  <a:schemeClr val="bg1"/>
+                </a:solidFill>
+                <a:latin typeface="VTB Group UI Book" panose="020B0503040504020204" pitchFamily="34" charset="-52"/>
+              </a:rPr>
+              <a:t>Синхронизация</a:t>
+            </a:r>
+            <a:endParaRPr lang="en-US" sz="3600" dirty="0">
+              <a:solidFill>
+                <a:schemeClr val="bg1"/>
+              </a:solidFill>
+              <a:latin typeface="VTB Group UI Book" panose="020B0503040504020204" pitchFamily="34" charset="-52"/>
+            </a:endParaRPr>
+          </a:p>
+        </p:txBody>
+      </p:sp>
+      <p:sp>
+        <p:nvSpPr>
+          <p:cNvPr id="4" name="TextBox 3">
+            <a:extLst>
+              <a:ext uri="{FF2B5EF4-FFF2-40B4-BE49-F238E27FC236}">
+                <a16:creationId xmlns:a16="http://schemas.microsoft.com/office/drawing/2014/main" id="{E88CEB05-BC97-4A91-193C-B717279DED4E}"/>
+              </a:ext>
+            </a:extLst>
+          </p:cNvPr>
+          <p:cNvSpPr txBox="1"/>
+          <p:nvPr/>
+        </p:nvSpPr>
+        <p:spPr>
+          <a:xfrm>
+            <a:off x="6799435" y="2070843"/>
+            <a:ext cx="5226501" cy="646331"/>
+          </a:xfrm>
+          <a:prstGeom prst="rect">
+            <a:avLst/>
+          </a:prstGeom>
+          <a:noFill/>
+        </p:spPr>
+        <p:txBody>
+          <a:bodyPr wrap="square">
+            <a:spAutoFit/>
+          </a:bodyPr>
+          <a:lstStyle/>
+          <a:p>
+            <a:pPr marL="0" indent="0" algn="ctr">
+              <a:buNone/>
+            </a:pPr>
+            <a:r>
+              <a:rPr lang="ru-RU" sz="3600">
+                <a:solidFill>
+                  <a:schemeClr val="bg1"/>
+                </a:solidFill>
+                <a:latin typeface="VTB Group UI Book" panose="020B0503040504020204" pitchFamily="34" charset="-52"/>
+              </a:rPr>
+              <a:t>Вовлеченность</a:t>
+            </a:r>
+            <a:endParaRPr lang="en-US" sz="3600" dirty="0">
+              <a:solidFill>
+                <a:schemeClr val="bg1"/>
+              </a:solidFill>
+              <a:latin typeface="VTB Group UI Book" panose="020B0503040504020204" pitchFamily="34" charset="-52"/>
+            </a:endParaRPr>
           </a:p>
         </p:txBody>
       </p:sp>
     </p:spTree>
     <p:extLst>
       <p:ext uri="{BB962C8B-B14F-4D97-AF65-F5344CB8AC3E}">
-        <p14:creationId xmlns:p14="http://schemas.microsoft.com/office/powerpoint/2010/main" val="3808727526"/>
+        <p14:creationId xmlns:p14="http://schemas.microsoft.com/office/powerpoint/2010/main" val="2896127051"/>
       </p:ext>
     </p:extLst>
   </p:cSld>
@@ -4507,7 +5083,7 @@
 </p:sld>
 </file>
 
-<file path=ppt/slides/slide2.xml><?xml version="1.0" encoding="utf-8"?>
+<file path=ppt/slides/slide3.xml><?xml version="1.0" encoding="utf-8"?>
 <p:sld xmlns:a="http://schemas.openxmlformats.org/drawingml/2006/main" xmlns:r="http://schemas.openxmlformats.org/officeDocument/2006/relationships" xmlns:p="http://schemas.openxmlformats.org/presentationml/2006/main">
   <p:cSld>
     <p:spTree>
@@ -4589,7 +5165,7 @@
           <p:nvPr>
             <p:extLst>
               <p:ext uri="{D42A27DB-BD31-4B8C-83A1-F6EECF244321}">
-                <p14:modId xmlns:p14="http://schemas.microsoft.com/office/powerpoint/2010/main" val="2107731723"/>
+                <p14:modId xmlns:p14="http://schemas.microsoft.com/office/powerpoint/2010/main" val="74127173"/>
               </p:ext>
             </p:extLst>
           </p:nvPr>
@@ -4628,12 +5204,50 @@
                     <a:p>
                       <a:pPr algn="ctr"/>
                       <a:r>
-                        <a:rPr lang="ru-RU"/>
+                        <a:rPr lang="ru-RU">
+                          <a:latin typeface="VTB Group UI Semi Bold" panose="020B0603050504020204" pitchFamily="34" charset="-52"/>
+                        </a:rPr>
                         <a:t>Требование</a:t>
                       </a:r>
                     </a:p>
                   </a:txBody>
                   <a:tcPr>
+                    <a:lnL w="12700" cap="flat" cmpd="sng" algn="ctr">
+                      <a:solidFill>
+                        <a:schemeClr val="tx1"/>
+                      </a:solidFill>
+                      <a:prstDash val="solid"/>
+                      <a:round/>
+                      <a:headEnd type="none" w="med" len="med"/>
+                      <a:tailEnd type="none" w="med" len="med"/>
+                    </a:lnL>
+                    <a:lnR w="12700" cap="flat" cmpd="sng" algn="ctr">
+                      <a:solidFill>
+                        <a:schemeClr val="tx1"/>
+                      </a:solidFill>
+                      <a:prstDash val="solid"/>
+                      <a:round/>
+                      <a:headEnd type="none" w="med" len="med"/>
+                      <a:tailEnd type="none" w="med" len="med"/>
+                    </a:lnR>
+                    <a:lnT w="12700" cap="flat" cmpd="sng" algn="ctr">
+                      <a:solidFill>
+                        <a:schemeClr val="tx1"/>
+                      </a:solidFill>
+                      <a:prstDash val="solid"/>
+                      <a:round/>
+                      <a:headEnd type="none" w="med" len="med"/>
+                      <a:tailEnd type="none" w="med" len="med"/>
+                    </a:lnT>
+                    <a:lnB w="12700" cap="flat" cmpd="sng" algn="ctr">
+                      <a:solidFill>
+                        <a:schemeClr val="tx1"/>
+                      </a:solidFill>
+                      <a:prstDash val="solid"/>
+                      <a:round/>
+                      <a:headEnd type="none" w="med" len="med"/>
+                      <a:tailEnd type="none" w="med" len="med"/>
+                    </a:lnB>
                     <a:solidFill>
                       <a:srgbClr val="0062FF"/>
                     </a:solidFill>
@@ -4646,12 +5260,50 @@
                     <a:p>
                       <a:pPr algn="ctr"/>
                       <a:r>
-                        <a:rPr lang="ru-RU"/>
+                        <a:rPr lang="ru-RU">
+                          <a:latin typeface="VTB Group UI Semi Bold" panose="020B0603050504020204" pitchFamily="34" charset="-52"/>
+                        </a:rPr>
                         <a:t>Описание</a:t>
                       </a:r>
                     </a:p>
                   </a:txBody>
                   <a:tcPr>
+                    <a:lnL w="12700" cap="flat" cmpd="sng" algn="ctr">
+                      <a:solidFill>
+                        <a:schemeClr val="tx1"/>
+                      </a:solidFill>
+                      <a:prstDash val="solid"/>
+                      <a:round/>
+                      <a:headEnd type="none" w="med" len="med"/>
+                      <a:tailEnd type="none" w="med" len="med"/>
+                    </a:lnL>
+                    <a:lnR w="12700" cap="flat" cmpd="sng" algn="ctr">
+                      <a:solidFill>
+                        <a:schemeClr val="tx1"/>
+                      </a:solidFill>
+                      <a:prstDash val="solid"/>
+                      <a:round/>
+                      <a:headEnd type="none" w="med" len="med"/>
+                      <a:tailEnd type="none" w="med" len="med"/>
+                    </a:lnR>
+                    <a:lnT w="12700" cap="flat" cmpd="sng" algn="ctr">
+                      <a:solidFill>
+                        <a:schemeClr val="tx1"/>
+                      </a:solidFill>
+                      <a:prstDash val="solid"/>
+                      <a:round/>
+                      <a:headEnd type="none" w="med" len="med"/>
+                      <a:tailEnd type="none" w="med" len="med"/>
+                    </a:lnT>
+                    <a:lnB w="12700" cap="flat" cmpd="sng" algn="ctr">
+                      <a:solidFill>
+                        <a:schemeClr val="tx1"/>
+                      </a:solidFill>
+                      <a:prstDash val="solid"/>
+                      <a:round/>
+                      <a:headEnd type="none" w="med" len="med"/>
+                      <a:tailEnd type="none" w="med" len="med"/>
+                    </a:lnB>
                     <a:solidFill>
                       <a:srgbClr val="0062FF"/>
                     </a:solidFill>
@@ -4675,14 +5327,53 @@
                           <a:solidFill>
                             <a:srgbClr val="141414"/>
                           </a:solidFill>
-                          <a:latin typeface="VTB Group UI Semi Bold"/>
+                          <a:latin typeface="VTB Group UI Book" panose="020B0503040504020204" pitchFamily="34" charset="-52"/>
                         </a:rPr>
                         <a:t>Создание доски вместе с ВКС</a:t>
                       </a:r>
-                      <a:endParaRPr lang="ru-RU"/>
+                      <a:endParaRPr lang="ru-RU">
+                        <a:latin typeface="VTB Group UI Book" panose="020B0503040504020204" pitchFamily="34" charset="-52"/>
+                      </a:endParaRPr>
                     </a:p>
                   </a:txBody>
-                  <a:tcPr marL="182880" marR="182880" anchor="ctr"/>
+                  <a:tcPr marL="182880" marR="182880" anchor="ctr">
+                    <a:lnL w="12700" cap="flat" cmpd="sng" algn="ctr">
+                      <a:solidFill>
+                        <a:schemeClr val="tx1"/>
+                      </a:solidFill>
+                      <a:prstDash val="solid"/>
+                      <a:round/>
+                      <a:headEnd type="none" w="med" len="med"/>
+                      <a:tailEnd type="none" w="med" len="med"/>
+                    </a:lnL>
+                    <a:lnR w="12700" cap="flat" cmpd="sng" algn="ctr">
+                      <a:solidFill>
+                        <a:schemeClr val="tx1"/>
+                      </a:solidFill>
+                      <a:prstDash val="solid"/>
+                      <a:round/>
+                      <a:headEnd type="none" w="med" len="med"/>
+                      <a:tailEnd type="none" w="med" len="med"/>
+                    </a:lnR>
+                    <a:lnT w="12700" cap="flat" cmpd="sng" algn="ctr">
+                      <a:solidFill>
+                        <a:schemeClr val="tx1"/>
+                      </a:solidFill>
+                      <a:prstDash val="solid"/>
+                      <a:round/>
+                      <a:headEnd type="none" w="med" len="med"/>
+                      <a:tailEnd type="none" w="med" len="med"/>
+                    </a:lnT>
+                    <a:lnB w="12700" cap="flat" cmpd="sng" algn="ctr">
+                      <a:solidFill>
+                        <a:schemeClr val="tx1"/>
+                      </a:solidFill>
+                      <a:prstDash val="solid"/>
+                      <a:round/>
+                      <a:headEnd type="none" w="med" len="med"/>
+                      <a:tailEnd type="none" w="med" len="med"/>
+                    </a:lnB>
+                  </a:tcPr>
                 </a:tc>
                 <a:tc>
                   <a:txBody>
@@ -4695,14 +5386,53 @@
                           <a:solidFill>
                             <a:srgbClr val="141414"/>
                           </a:solidFill>
-                          <a:latin typeface="VTB Group UI Book"/>
+                          <a:latin typeface="VTB Group UI Book" panose="020B0503040504020204" pitchFamily="34" charset="-52"/>
                         </a:rPr>
                         <a:t>Переключатель «Доска» в Оповещаторе. По кнопке «Оповестить» доска создаётся вместе с ВКС и привязывается к комнате DION</a:t>
                       </a:r>
-                      <a:endParaRPr lang="ru-RU"/>
+                      <a:endParaRPr lang="ru-RU">
+                        <a:latin typeface="VTB Group UI Book" panose="020B0503040504020204" pitchFamily="34" charset="-52"/>
+                      </a:endParaRPr>
                     </a:p>
                   </a:txBody>
-                  <a:tcPr marL="182880" marR="182880" anchor="ctr"/>
+                  <a:tcPr marL="182880" marR="182880" anchor="ctr">
+                    <a:lnL w="12700" cap="flat" cmpd="sng" algn="ctr">
+                      <a:solidFill>
+                        <a:schemeClr val="tx1"/>
+                      </a:solidFill>
+                      <a:prstDash val="solid"/>
+                      <a:round/>
+                      <a:headEnd type="none" w="med" len="med"/>
+                      <a:tailEnd type="none" w="med" len="med"/>
+                    </a:lnL>
+                    <a:lnR w="12700" cap="flat" cmpd="sng" algn="ctr">
+                      <a:solidFill>
+                        <a:schemeClr val="tx1"/>
+                      </a:solidFill>
+                      <a:prstDash val="solid"/>
+                      <a:round/>
+                      <a:headEnd type="none" w="med" len="med"/>
+                      <a:tailEnd type="none" w="med" len="med"/>
+                    </a:lnR>
+                    <a:lnT w="12700" cap="flat" cmpd="sng" algn="ctr">
+                      <a:solidFill>
+                        <a:schemeClr val="tx1"/>
+                      </a:solidFill>
+                      <a:prstDash val="solid"/>
+                      <a:round/>
+                      <a:headEnd type="none" w="med" len="med"/>
+                      <a:tailEnd type="none" w="med" len="med"/>
+                    </a:lnT>
+                    <a:lnB w="12700" cap="flat" cmpd="sng" algn="ctr">
+                      <a:solidFill>
+                        <a:schemeClr val="tx1"/>
+                      </a:solidFill>
+                      <a:prstDash val="solid"/>
+                      <a:round/>
+                      <a:headEnd type="none" w="med" len="med"/>
+                      <a:tailEnd type="none" w="med" len="med"/>
+                    </a:lnB>
+                  </a:tcPr>
                 </a:tc>
                 <a:extLst>
                   <a:ext uri="{0D108BD9-81ED-4DB2-BD59-A6C34878D82A}">
@@ -4722,14 +5452,53 @@
                           <a:solidFill>
                             <a:srgbClr val="141414"/>
                           </a:solidFill>
-                          <a:latin typeface="VTB Group UI Semi Bold"/>
+                          <a:latin typeface="VTB Group UI Book" panose="020B0503040504020204" pitchFamily="34" charset="-52"/>
                         </a:rPr>
                         <a:t>Ссылка в оповещении</a:t>
                       </a:r>
-                      <a:endParaRPr lang="ru-RU"/>
+                      <a:endParaRPr lang="ru-RU">
+                        <a:latin typeface="VTB Group UI Book" panose="020B0503040504020204" pitchFamily="34" charset="-52"/>
+                      </a:endParaRPr>
                     </a:p>
                   </a:txBody>
-                  <a:tcPr marL="182880" marR="182880" anchor="ctr"/>
+                  <a:tcPr marL="182880" marR="182880" anchor="ctr">
+                    <a:lnL w="12700" cap="flat" cmpd="sng" algn="ctr">
+                      <a:solidFill>
+                        <a:schemeClr val="tx1"/>
+                      </a:solidFill>
+                      <a:prstDash val="solid"/>
+                      <a:round/>
+                      <a:headEnd type="none" w="med" len="med"/>
+                      <a:tailEnd type="none" w="med" len="med"/>
+                    </a:lnL>
+                    <a:lnR w="12700" cap="flat" cmpd="sng" algn="ctr">
+                      <a:solidFill>
+                        <a:schemeClr val="tx1"/>
+                      </a:solidFill>
+                      <a:prstDash val="solid"/>
+                      <a:round/>
+                      <a:headEnd type="none" w="med" len="med"/>
+                      <a:tailEnd type="none" w="med" len="med"/>
+                    </a:lnR>
+                    <a:lnT w="12700" cap="flat" cmpd="sng" algn="ctr">
+                      <a:solidFill>
+                        <a:schemeClr val="tx1"/>
+                      </a:solidFill>
+                      <a:prstDash val="solid"/>
+                      <a:round/>
+                      <a:headEnd type="none" w="med" len="med"/>
+                      <a:tailEnd type="none" w="med" len="med"/>
+                    </a:lnT>
+                    <a:lnB w="12700" cap="flat" cmpd="sng" algn="ctr">
+                      <a:solidFill>
+                        <a:schemeClr val="tx1"/>
+                      </a:solidFill>
+                      <a:prstDash val="solid"/>
+                      <a:round/>
+                      <a:headEnd type="none" w="med" len="med"/>
+                      <a:tailEnd type="none" w="med" len="med"/>
+                    </a:lnB>
+                  </a:tcPr>
                 </a:tc>
                 <a:tc>
                   <a:txBody>
@@ -4742,14 +5511,53 @@
                           <a:solidFill>
                             <a:srgbClr val="141414"/>
                           </a:solidFill>
-                          <a:latin typeface="VTB Group UI Book"/>
+                          <a:latin typeface="VTB Group UI Book" panose="020B0503040504020204" pitchFamily="34" charset="-52"/>
                         </a:rPr>
                         <a:t>Ссылка на доску видна в предпросмотре и уходит участникам в одном сообщении со ссылкой на ВКС</a:t>
                       </a:r>
-                      <a:endParaRPr lang="ru-RU"/>
+                      <a:endParaRPr lang="ru-RU">
+                        <a:latin typeface="VTB Group UI Book" panose="020B0503040504020204" pitchFamily="34" charset="-52"/>
+                      </a:endParaRPr>
                     </a:p>
                   </a:txBody>
-                  <a:tcPr marL="182880" marR="182880" anchor="ctr"/>
+                  <a:tcPr marL="182880" marR="182880" anchor="ctr">
+                    <a:lnL w="12700" cap="flat" cmpd="sng" algn="ctr">
+                      <a:solidFill>
+                        <a:schemeClr val="tx1"/>
+                      </a:solidFill>
+                      <a:prstDash val="solid"/>
+                      <a:round/>
+                      <a:headEnd type="none" w="med" len="med"/>
+                      <a:tailEnd type="none" w="med" len="med"/>
+                    </a:lnL>
+                    <a:lnR w="12700" cap="flat" cmpd="sng" algn="ctr">
+                      <a:solidFill>
+                        <a:schemeClr val="tx1"/>
+                      </a:solidFill>
+                      <a:prstDash val="solid"/>
+                      <a:round/>
+                      <a:headEnd type="none" w="med" len="med"/>
+                      <a:tailEnd type="none" w="med" len="med"/>
+                    </a:lnR>
+                    <a:lnT w="12700" cap="flat" cmpd="sng" algn="ctr">
+                      <a:solidFill>
+                        <a:schemeClr val="tx1"/>
+                      </a:solidFill>
+                      <a:prstDash val="solid"/>
+                      <a:round/>
+                      <a:headEnd type="none" w="med" len="med"/>
+                      <a:tailEnd type="none" w="med" len="med"/>
+                    </a:lnT>
+                    <a:lnB w="12700" cap="flat" cmpd="sng" algn="ctr">
+                      <a:solidFill>
+                        <a:schemeClr val="tx1"/>
+                      </a:solidFill>
+                      <a:prstDash val="solid"/>
+                      <a:round/>
+                      <a:headEnd type="none" w="med" len="med"/>
+                      <a:tailEnd type="none" w="med" len="med"/>
+                    </a:lnB>
+                  </a:tcPr>
                 </a:tc>
                 <a:extLst>
                   <a:ext uri="{0D108BD9-81ED-4DB2-BD59-A6C34878D82A}">
@@ -4769,14 +5577,53 @@
                           <a:solidFill>
                             <a:srgbClr val="141414"/>
                           </a:solidFill>
-                          <a:latin typeface="VTB Group UI Semi Bold"/>
+                          <a:latin typeface="VTB Group UI Book" panose="020B0503040504020204" pitchFamily="34" charset="-52"/>
                         </a:rPr>
                         <a:t>Контекст аварии на доске</a:t>
                       </a:r>
-                      <a:endParaRPr lang="ru-RU"/>
+                      <a:endParaRPr lang="ru-RU">
+                        <a:latin typeface="VTB Group UI Book" panose="020B0503040504020204" pitchFamily="34" charset="-52"/>
+                      </a:endParaRPr>
                     </a:p>
                   </a:txBody>
-                  <a:tcPr marL="182880" marR="182880" anchor="ctr"/>
+                  <a:tcPr marL="182880" marR="182880" anchor="ctr">
+                    <a:lnL w="12700" cap="flat" cmpd="sng" algn="ctr">
+                      <a:solidFill>
+                        <a:schemeClr val="tx1"/>
+                      </a:solidFill>
+                      <a:prstDash val="solid"/>
+                      <a:round/>
+                      <a:headEnd type="none" w="med" len="med"/>
+                      <a:tailEnd type="none" w="med" len="med"/>
+                    </a:lnL>
+                    <a:lnR w="12700" cap="flat" cmpd="sng" algn="ctr">
+                      <a:solidFill>
+                        <a:schemeClr val="tx1"/>
+                      </a:solidFill>
+                      <a:prstDash val="solid"/>
+                      <a:round/>
+                      <a:headEnd type="none" w="med" len="med"/>
+                      <a:tailEnd type="none" w="med" len="med"/>
+                    </a:lnR>
+                    <a:lnT w="12700" cap="flat" cmpd="sng" algn="ctr">
+                      <a:solidFill>
+                        <a:schemeClr val="tx1"/>
+                      </a:solidFill>
+                      <a:prstDash val="solid"/>
+                      <a:round/>
+                      <a:headEnd type="none" w="med" len="med"/>
+                      <a:tailEnd type="none" w="med" len="med"/>
+                    </a:lnT>
+                    <a:lnB w="12700" cap="flat" cmpd="sng" algn="ctr">
+                      <a:solidFill>
+                        <a:schemeClr val="tx1"/>
+                      </a:solidFill>
+                      <a:prstDash val="solid"/>
+                      <a:round/>
+                      <a:headEnd type="none" w="med" len="med"/>
+                      <a:tailEnd type="none" w="med" len="med"/>
+                    </a:lnB>
+                  </a:tcPr>
                 </a:tc>
                 <a:tc>
                   <a:txBody>
@@ -4789,14 +5636,53 @@
                           <a:solidFill>
                             <a:srgbClr val="141414"/>
                           </a:solidFill>
-                          <a:latin typeface="VTB Group UI Book"/>
+                          <a:latin typeface="VTB Group UI Book" panose="020B0503040504020204" pitchFamily="34" charset="-52"/>
                         </a:rPr>
                         <a:t>Доска заполняется по шаблону: ID аварии, система, КЕ, критичность, точка сбоя, связанные сервисы, ID ВКС</a:t>
                       </a:r>
-                      <a:endParaRPr lang="ru-RU"/>
+                      <a:endParaRPr lang="ru-RU">
+                        <a:latin typeface="VTB Group UI Book" panose="020B0503040504020204" pitchFamily="34" charset="-52"/>
+                      </a:endParaRPr>
                     </a:p>
                   </a:txBody>
-                  <a:tcPr marL="182880" marR="182880" anchor="ctr"/>
+                  <a:tcPr marL="182880" marR="182880" anchor="ctr">
+                    <a:lnL w="12700" cap="flat" cmpd="sng" algn="ctr">
+                      <a:solidFill>
+                        <a:schemeClr val="tx1"/>
+                      </a:solidFill>
+                      <a:prstDash val="solid"/>
+                      <a:round/>
+                      <a:headEnd type="none" w="med" len="med"/>
+                      <a:tailEnd type="none" w="med" len="med"/>
+                    </a:lnL>
+                    <a:lnR w="12700" cap="flat" cmpd="sng" algn="ctr">
+                      <a:solidFill>
+                        <a:schemeClr val="tx1"/>
+                      </a:solidFill>
+                      <a:prstDash val="solid"/>
+                      <a:round/>
+                      <a:headEnd type="none" w="med" len="med"/>
+                      <a:tailEnd type="none" w="med" len="med"/>
+                    </a:lnR>
+                    <a:lnT w="12700" cap="flat" cmpd="sng" algn="ctr">
+                      <a:solidFill>
+                        <a:schemeClr val="tx1"/>
+                      </a:solidFill>
+                      <a:prstDash val="solid"/>
+                      <a:round/>
+                      <a:headEnd type="none" w="med" len="med"/>
+                      <a:tailEnd type="none" w="med" len="med"/>
+                    </a:lnT>
+                    <a:lnB w="12700" cap="flat" cmpd="sng" algn="ctr">
+                      <a:solidFill>
+                        <a:schemeClr val="tx1"/>
+                      </a:solidFill>
+                      <a:prstDash val="solid"/>
+                      <a:round/>
+                      <a:headEnd type="none" w="med" len="med"/>
+                      <a:tailEnd type="none" w="med" len="med"/>
+                    </a:lnB>
+                  </a:tcPr>
                 </a:tc>
                 <a:extLst>
                   <a:ext uri="{0D108BD9-81ED-4DB2-BD59-A6C34878D82A}">
@@ -4816,14 +5702,53 @@
                           <a:solidFill>
                             <a:srgbClr val="141414"/>
                           </a:solidFill>
-                          <a:latin typeface="VTB Group UI Semi Bold"/>
+                          <a:latin typeface="VTB Group UI Book" panose="020B0503040504020204" pitchFamily="34" charset="-52"/>
                         </a:rPr>
                         <a:t>Совместная работа</a:t>
                       </a:r>
-                      <a:endParaRPr lang="ru-RU"/>
+                      <a:endParaRPr lang="ru-RU">
+                        <a:latin typeface="VTB Group UI Book" panose="020B0503040504020204" pitchFamily="34" charset="-52"/>
+                      </a:endParaRPr>
                     </a:p>
                   </a:txBody>
-                  <a:tcPr marL="182880" marR="182880" anchor="ctr"/>
+                  <a:tcPr marL="182880" marR="182880" anchor="ctr">
+                    <a:lnL w="12700" cap="flat" cmpd="sng" algn="ctr">
+                      <a:solidFill>
+                        <a:schemeClr val="tx1"/>
+                      </a:solidFill>
+                      <a:prstDash val="solid"/>
+                      <a:round/>
+                      <a:headEnd type="none" w="med" len="med"/>
+                      <a:tailEnd type="none" w="med" len="med"/>
+                    </a:lnL>
+                    <a:lnR w="12700" cap="flat" cmpd="sng" algn="ctr">
+                      <a:solidFill>
+                        <a:schemeClr val="tx1"/>
+                      </a:solidFill>
+                      <a:prstDash val="solid"/>
+                      <a:round/>
+                      <a:headEnd type="none" w="med" len="med"/>
+                      <a:tailEnd type="none" w="med" len="med"/>
+                    </a:lnR>
+                    <a:lnT w="12700" cap="flat" cmpd="sng" algn="ctr">
+                      <a:solidFill>
+                        <a:schemeClr val="tx1"/>
+                      </a:solidFill>
+                      <a:prstDash val="solid"/>
+                      <a:round/>
+                      <a:headEnd type="none" w="med" len="med"/>
+                      <a:tailEnd type="none" w="med" len="med"/>
+                    </a:lnT>
+                    <a:lnB w="12700" cap="flat" cmpd="sng" algn="ctr">
+                      <a:solidFill>
+                        <a:schemeClr val="tx1"/>
+                      </a:solidFill>
+                      <a:prstDash val="solid"/>
+                      <a:round/>
+                      <a:headEnd type="none" w="med" len="med"/>
+                      <a:tailEnd type="none" w="med" len="med"/>
+                    </a:lnB>
+                  </a:tcPr>
                 </a:tc>
                 <a:tc>
                   <a:txBody>
@@ -4836,14 +5761,53 @@
                           <a:solidFill>
                             <a:srgbClr val="141414"/>
                           </a:solidFill>
-                          <a:latin typeface="VTB Group UI Book"/>
+                          <a:latin typeface="VTB Group UI Book" panose="020B0503040504020204" pitchFamily="34" charset="-52"/>
                         </a:rPr>
                         <a:t>Стикеры, текст, фигуры и рамки; курсоры и имена участников видны в реальном времени</a:t>
                       </a:r>
-                      <a:endParaRPr lang="ru-RU"/>
+                      <a:endParaRPr lang="ru-RU">
+                        <a:latin typeface="VTB Group UI Book" panose="020B0503040504020204" pitchFamily="34" charset="-52"/>
+                      </a:endParaRPr>
                     </a:p>
                   </a:txBody>
-                  <a:tcPr marL="182880" marR="182880" anchor="ctr"/>
+                  <a:tcPr marL="182880" marR="182880" anchor="ctr">
+                    <a:lnL w="12700" cap="flat" cmpd="sng" algn="ctr">
+                      <a:solidFill>
+                        <a:schemeClr val="tx1"/>
+                      </a:solidFill>
+                      <a:prstDash val="solid"/>
+                      <a:round/>
+                      <a:headEnd type="none" w="med" len="med"/>
+                      <a:tailEnd type="none" w="med" len="med"/>
+                    </a:lnL>
+                    <a:lnR w="12700" cap="flat" cmpd="sng" algn="ctr">
+                      <a:solidFill>
+                        <a:schemeClr val="tx1"/>
+                      </a:solidFill>
+                      <a:prstDash val="solid"/>
+                      <a:round/>
+                      <a:headEnd type="none" w="med" len="med"/>
+                      <a:tailEnd type="none" w="med" len="med"/>
+                    </a:lnR>
+                    <a:lnT w="12700" cap="flat" cmpd="sng" algn="ctr">
+                      <a:solidFill>
+                        <a:schemeClr val="tx1"/>
+                      </a:solidFill>
+                      <a:prstDash val="solid"/>
+                      <a:round/>
+                      <a:headEnd type="none" w="med" len="med"/>
+                      <a:tailEnd type="none" w="med" len="med"/>
+                    </a:lnT>
+                    <a:lnB w="12700" cap="flat" cmpd="sng" algn="ctr">
+                      <a:solidFill>
+                        <a:schemeClr val="tx1"/>
+                      </a:solidFill>
+                      <a:prstDash val="solid"/>
+                      <a:round/>
+                      <a:headEnd type="none" w="med" len="med"/>
+                      <a:tailEnd type="none" w="med" len="med"/>
+                    </a:lnB>
+                  </a:tcPr>
                 </a:tc>
                 <a:extLst>
                   <a:ext uri="{0D108BD9-81ED-4DB2-BD59-A6C34878D82A}">
@@ -4863,14 +5827,53 @@
                           <a:solidFill>
                             <a:srgbClr val="141414"/>
                           </a:solidFill>
-                          <a:latin typeface="VTB Group UI Semi Bold"/>
+                          <a:latin typeface="VTB Group UI Book" panose="020B0503040504020204" pitchFamily="34" charset="-52"/>
                         </a:rPr>
                         <a:t>История и личная копия</a:t>
                       </a:r>
-                      <a:endParaRPr lang="ru-RU"/>
+                      <a:endParaRPr lang="ru-RU">
+                        <a:latin typeface="VTB Group UI Book" panose="020B0503040504020204" pitchFamily="34" charset="-52"/>
+                      </a:endParaRPr>
                     </a:p>
                   </a:txBody>
-                  <a:tcPr marL="182880" marR="182880" anchor="ctr"/>
+                  <a:tcPr marL="182880" marR="182880" anchor="ctr">
+                    <a:lnL w="12700" cap="flat" cmpd="sng" algn="ctr">
+                      <a:solidFill>
+                        <a:schemeClr val="tx1"/>
+                      </a:solidFill>
+                      <a:prstDash val="solid"/>
+                      <a:round/>
+                      <a:headEnd type="none" w="med" len="med"/>
+                      <a:tailEnd type="none" w="med" len="med"/>
+                    </a:lnL>
+                    <a:lnR w="12700" cap="flat" cmpd="sng" algn="ctr">
+                      <a:solidFill>
+                        <a:schemeClr val="tx1"/>
+                      </a:solidFill>
+                      <a:prstDash val="solid"/>
+                      <a:round/>
+                      <a:headEnd type="none" w="med" len="med"/>
+                      <a:tailEnd type="none" w="med" len="med"/>
+                    </a:lnR>
+                    <a:lnT w="12700" cap="flat" cmpd="sng" algn="ctr">
+                      <a:solidFill>
+                        <a:schemeClr val="tx1"/>
+                      </a:solidFill>
+                      <a:prstDash val="solid"/>
+                      <a:round/>
+                      <a:headEnd type="none" w="med" len="med"/>
+                      <a:tailEnd type="none" w="med" len="med"/>
+                    </a:lnT>
+                    <a:lnB w="12700" cap="flat" cmpd="sng" algn="ctr">
+                      <a:solidFill>
+                        <a:schemeClr val="tx1"/>
+                      </a:solidFill>
+                      <a:prstDash val="solid"/>
+                      <a:round/>
+                      <a:headEnd type="none" w="med" len="med"/>
+                      <a:tailEnd type="none" w="med" len="med"/>
+                    </a:lnB>
+                  </a:tcPr>
                 </a:tc>
                 <a:tc>
                   <a:txBody>
@@ -4883,7 +5886,7 @@
                           <a:solidFill>
                             <a:srgbClr val="141414"/>
                           </a:solidFill>
-                          <a:latin typeface="VTB Group UI Book"/>
+                          <a:latin typeface="VTB Group UI Book" panose="020B0503040504020204" pitchFamily="34" charset="-52"/>
                         </a:rPr>
                         <a:t>Перед новой ВКС состояние доски уходит в бэкап (только просмотр); </a:t>
                       </a:r>
@@ -4895,7 +5898,7 @@
                           <a:highlight>
                             <a:srgbClr val="FFFF00"/>
                           </a:highlight>
-                          <a:latin typeface="VTB Group UI Book"/>
+                          <a:latin typeface="VTB Group UI Book" panose="020B0503040504020204" pitchFamily="34" charset="-52"/>
                         </a:rPr>
                         <a:t>доску можно скопировать в личное пространство</a:t>
                       </a:r>
@@ -4903,10 +5906,48 @@
                         <a:highlight>
                           <a:srgbClr val="FFFF00"/>
                         </a:highlight>
+                        <a:latin typeface="VTB Group UI Book" panose="020B0503040504020204" pitchFamily="34" charset="-52"/>
                       </a:endParaRPr>
                     </a:p>
                   </a:txBody>
-                  <a:tcPr marL="182880" marR="182880" anchor="ctr"/>
+                  <a:tcPr marL="182880" marR="182880" anchor="ctr">
+                    <a:lnL w="12700" cap="flat" cmpd="sng" algn="ctr">
+                      <a:solidFill>
+                        <a:schemeClr val="tx1"/>
+                      </a:solidFill>
+                      <a:prstDash val="solid"/>
+                      <a:round/>
+                      <a:headEnd type="none" w="med" len="med"/>
+                      <a:tailEnd type="none" w="med" len="med"/>
+                    </a:lnL>
+                    <a:lnR w="12700" cap="flat" cmpd="sng" algn="ctr">
+                      <a:solidFill>
+                        <a:schemeClr val="tx1"/>
+                      </a:solidFill>
+                      <a:prstDash val="solid"/>
+                      <a:round/>
+                      <a:headEnd type="none" w="med" len="med"/>
+                      <a:tailEnd type="none" w="med" len="med"/>
+                    </a:lnR>
+                    <a:lnT w="12700" cap="flat" cmpd="sng" algn="ctr">
+                      <a:solidFill>
+                        <a:schemeClr val="tx1"/>
+                      </a:solidFill>
+                      <a:prstDash val="solid"/>
+                      <a:round/>
+                      <a:headEnd type="none" w="med" len="med"/>
+                      <a:tailEnd type="none" w="med" len="med"/>
+                    </a:lnT>
+                    <a:lnB w="12700" cap="flat" cmpd="sng" algn="ctr">
+                      <a:solidFill>
+                        <a:schemeClr val="tx1"/>
+                      </a:solidFill>
+                      <a:prstDash val="solid"/>
+                      <a:round/>
+                      <a:headEnd type="none" w="med" len="med"/>
+                      <a:tailEnd type="none" w="med" len="med"/>
+                    </a:lnB>
+                  </a:tcPr>
                 </a:tc>
                 <a:extLst>
                   <a:ext uri="{0D108BD9-81ED-4DB2-BD59-A6C34878D82A}">
@@ -4931,7 +5972,7 @@
 </p:sld>
 </file>
 
-<file path=ppt/slides/slide3.xml><?xml version="1.0" encoding="utf-8"?>
+<file path=ppt/slides/slide4.xml><?xml version="1.0" encoding="utf-8"?>
 <p:sld xmlns:a="http://schemas.openxmlformats.org/drawingml/2006/main" xmlns:r="http://schemas.openxmlformats.org/officeDocument/2006/relationships" xmlns:p="http://schemas.openxmlformats.org/presentationml/2006/main">
   <p:cSld>
     <p:spTree>
@@ -5013,7 +6054,7 @@
           <p:nvPr>
             <p:extLst>
               <p:ext uri="{D42A27DB-BD31-4B8C-83A1-F6EECF244321}">
-                <p14:modId xmlns:p14="http://schemas.microsoft.com/office/powerpoint/2010/main" val="52340865"/>
+                <p14:modId xmlns:p14="http://schemas.microsoft.com/office/powerpoint/2010/main" val="635499141"/>
               </p:ext>
             </p:extLst>
           </p:nvPr>
@@ -5052,12 +6093,50 @@
                     <a:p>
                       <a:pPr algn="ctr"/>
                       <a:r>
-                        <a:rPr lang="ru-RU"/>
+                        <a:rPr lang="ru-RU">
+                          <a:latin typeface="VTB Group UI Semi Bold" panose="020B0603050504020204" pitchFamily="34" charset="-52"/>
+                        </a:rPr>
                         <a:t>Требование</a:t>
                       </a:r>
                     </a:p>
                   </a:txBody>
                   <a:tcPr>
+                    <a:lnL w="12700" cap="flat" cmpd="sng" algn="ctr">
+                      <a:solidFill>
+                        <a:schemeClr val="tx1"/>
+                      </a:solidFill>
+                      <a:prstDash val="solid"/>
+                      <a:round/>
+                      <a:headEnd type="none" w="med" len="med"/>
+                      <a:tailEnd type="none" w="med" len="med"/>
+                    </a:lnL>
+                    <a:lnR w="12700" cap="flat" cmpd="sng" algn="ctr">
+                      <a:solidFill>
+                        <a:schemeClr val="tx1"/>
+                      </a:solidFill>
+                      <a:prstDash val="solid"/>
+                      <a:round/>
+                      <a:headEnd type="none" w="med" len="med"/>
+                      <a:tailEnd type="none" w="med" len="med"/>
+                    </a:lnR>
+                    <a:lnT w="12700" cap="flat" cmpd="sng" algn="ctr">
+                      <a:solidFill>
+                        <a:schemeClr val="tx1"/>
+                      </a:solidFill>
+                      <a:prstDash val="solid"/>
+                      <a:round/>
+                      <a:headEnd type="none" w="med" len="med"/>
+                      <a:tailEnd type="none" w="med" len="med"/>
+                    </a:lnT>
+                    <a:lnB w="12700" cap="flat" cmpd="sng" algn="ctr">
+                      <a:solidFill>
+                        <a:schemeClr val="tx1"/>
+                      </a:solidFill>
+                      <a:prstDash val="solid"/>
+                      <a:round/>
+                      <a:headEnd type="none" w="med" len="med"/>
+                      <a:tailEnd type="none" w="med" len="med"/>
+                    </a:lnB>
                     <a:solidFill>
                       <a:srgbClr val="0062FF"/>
                     </a:solidFill>
@@ -5070,12 +6149,50 @@
                     <a:p>
                       <a:pPr algn="ctr"/>
                       <a:r>
-                        <a:rPr lang="ru-RU"/>
+                        <a:rPr lang="ru-RU">
+                          <a:latin typeface="VTB Group UI Semi Bold" panose="020B0603050504020204" pitchFamily="34" charset="-52"/>
+                        </a:rPr>
                         <a:t>Описание</a:t>
                       </a:r>
                     </a:p>
                   </a:txBody>
                   <a:tcPr>
+                    <a:lnL w="12700" cap="flat" cmpd="sng" algn="ctr">
+                      <a:solidFill>
+                        <a:schemeClr val="tx1"/>
+                      </a:solidFill>
+                      <a:prstDash val="solid"/>
+                      <a:round/>
+                      <a:headEnd type="none" w="med" len="med"/>
+                      <a:tailEnd type="none" w="med" len="med"/>
+                    </a:lnL>
+                    <a:lnR w="12700" cap="flat" cmpd="sng" algn="ctr">
+                      <a:solidFill>
+                        <a:schemeClr val="tx1"/>
+                      </a:solidFill>
+                      <a:prstDash val="solid"/>
+                      <a:round/>
+                      <a:headEnd type="none" w="med" len="med"/>
+                      <a:tailEnd type="none" w="med" len="med"/>
+                    </a:lnR>
+                    <a:lnT w="12700" cap="flat" cmpd="sng" algn="ctr">
+                      <a:solidFill>
+                        <a:schemeClr val="tx1"/>
+                      </a:solidFill>
+                      <a:prstDash val="solid"/>
+                      <a:round/>
+                      <a:headEnd type="none" w="med" len="med"/>
+                      <a:tailEnd type="none" w="med" len="med"/>
+                    </a:lnT>
+                    <a:lnB w="12700" cap="flat" cmpd="sng" algn="ctr">
+                      <a:solidFill>
+                        <a:schemeClr val="tx1"/>
+                      </a:solidFill>
+                      <a:prstDash val="solid"/>
+                      <a:round/>
+                      <a:headEnd type="none" w="med" len="med"/>
+                      <a:tailEnd type="none" w="med" len="med"/>
+                    </a:lnB>
                     <a:solidFill>
                       <a:srgbClr val="0062FF"/>
                     </a:solidFill>
@@ -5099,14 +6216,53 @@
                           <a:solidFill>
                             <a:srgbClr val="141414"/>
                           </a:solidFill>
-                          <a:latin typeface="VTB Group UI Semi Bold"/>
+                          <a:latin typeface="VTB Group UI Book" panose="020B0503040504020204" pitchFamily="34" charset="-52"/>
                         </a:rPr>
                         <a:t>Производительность</a:t>
                       </a:r>
-                      <a:endParaRPr lang="ru-RU"/>
+                      <a:endParaRPr lang="ru-RU">
+                        <a:latin typeface="VTB Group UI Book" panose="020B0503040504020204" pitchFamily="34" charset="-52"/>
+                      </a:endParaRPr>
                     </a:p>
                   </a:txBody>
-                  <a:tcPr marL="182880" marR="182880" anchor="ctr"/>
+                  <a:tcPr marL="182880" marR="182880" anchor="ctr">
+                    <a:lnL w="12700" cap="flat" cmpd="sng" algn="ctr">
+                      <a:solidFill>
+                        <a:schemeClr val="tx1"/>
+                      </a:solidFill>
+                      <a:prstDash val="solid"/>
+                      <a:round/>
+                      <a:headEnd type="none" w="med" len="med"/>
+                      <a:tailEnd type="none" w="med" len="med"/>
+                    </a:lnL>
+                    <a:lnR w="12700" cap="flat" cmpd="sng" algn="ctr">
+                      <a:solidFill>
+                        <a:schemeClr val="tx1"/>
+                      </a:solidFill>
+                      <a:prstDash val="solid"/>
+                      <a:round/>
+                      <a:headEnd type="none" w="med" len="med"/>
+                      <a:tailEnd type="none" w="med" len="med"/>
+                    </a:lnR>
+                    <a:lnT w="12700" cap="flat" cmpd="sng" algn="ctr">
+                      <a:solidFill>
+                        <a:schemeClr val="tx1"/>
+                      </a:solidFill>
+                      <a:prstDash val="solid"/>
+                      <a:round/>
+                      <a:headEnd type="none" w="med" len="med"/>
+                      <a:tailEnd type="none" w="med" len="med"/>
+                    </a:lnT>
+                    <a:lnB w="12700" cap="flat" cmpd="sng" algn="ctr">
+                      <a:solidFill>
+                        <a:schemeClr val="tx1"/>
+                      </a:solidFill>
+                      <a:prstDash val="solid"/>
+                      <a:round/>
+                      <a:headEnd type="none" w="med" len="med"/>
+                      <a:tailEnd type="none" w="med" len="med"/>
+                    </a:lnB>
+                  </a:tcPr>
                 </a:tc>
                 <a:tc>
                   <a:txBody>
@@ -5119,7 +6275,7 @@
                           <a:solidFill>
                             <a:srgbClr val="141414"/>
                           </a:solidFill>
-                          <a:latin typeface="VTB Group UI Book"/>
+                          <a:latin typeface="VTB Group UI Book" panose="020B0503040504020204" pitchFamily="34" charset="-52"/>
                         </a:rPr>
                         <a:t>Доска создаётся не дольше </a:t>
                       </a:r>
@@ -5131,7 +6287,7 @@
                           <a:highlight>
                             <a:srgbClr val="FFFF00"/>
                           </a:highlight>
-                          <a:latin typeface="VTB Group UI Book"/>
+                          <a:latin typeface="VTB Group UI Book" panose="020B0503040504020204" pitchFamily="34" charset="-52"/>
                         </a:rPr>
                         <a:t>3 с </a:t>
                       </a:r>
@@ -5140,7 +6296,7 @@
                           <a:solidFill>
                             <a:srgbClr val="141414"/>
                           </a:solidFill>
-                          <a:latin typeface="VTB Group UI Book"/>
+                          <a:latin typeface="VTB Group UI Book" panose="020B0503040504020204" pitchFamily="34" charset="-52"/>
                         </a:rPr>
                         <a:t>после «Оповестить»; </a:t>
                       </a:r>
@@ -5152,7 +6308,7 @@
                           <a:solidFill>
                             <a:srgbClr val="141414"/>
                           </a:solidFill>
-                          <a:latin typeface="VTB Group UI Book"/>
+                          <a:latin typeface="VTB Group UI Book" panose="020B0503040504020204" pitchFamily="34" charset="-52"/>
                         </a:rPr>
                         <a:t>Правки видны участникам не позже чем через </a:t>
                       </a:r>
@@ -5164,7 +6320,7 @@
                           <a:highlight>
                             <a:srgbClr val="FFFF00"/>
                           </a:highlight>
-                          <a:latin typeface="VTB Group UI Book"/>
+                          <a:latin typeface="VTB Group UI Book" panose="020B0503040504020204" pitchFamily="34" charset="-52"/>
                         </a:rPr>
                         <a:t>1 с (больше - дискомфорт)</a:t>
                       </a:r>
@@ -5172,10 +6328,48 @@
                         <a:highlight>
                           <a:srgbClr val="FFFF00"/>
                         </a:highlight>
+                        <a:latin typeface="VTB Group UI Book" panose="020B0503040504020204" pitchFamily="34" charset="-52"/>
                       </a:endParaRPr>
                     </a:p>
                   </a:txBody>
-                  <a:tcPr marL="182880" marR="182880" anchor="ctr"/>
+                  <a:tcPr marL="182880" marR="182880" anchor="ctr">
+                    <a:lnL w="12700" cap="flat" cmpd="sng" algn="ctr">
+                      <a:solidFill>
+                        <a:schemeClr val="tx1"/>
+                      </a:solidFill>
+                      <a:prstDash val="solid"/>
+                      <a:round/>
+                      <a:headEnd type="none" w="med" len="med"/>
+                      <a:tailEnd type="none" w="med" len="med"/>
+                    </a:lnL>
+                    <a:lnR w="12700" cap="flat" cmpd="sng" algn="ctr">
+                      <a:solidFill>
+                        <a:schemeClr val="tx1"/>
+                      </a:solidFill>
+                      <a:prstDash val="solid"/>
+                      <a:round/>
+                      <a:headEnd type="none" w="med" len="med"/>
+                      <a:tailEnd type="none" w="med" len="med"/>
+                    </a:lnR>
+                    <a:lnT w="12700" cap="flat" cmpd="sng" algn="ctr">
+                      <a:solidFill>
+                        <a:schemeClr val="tx1"/>
+                      </a:solidFill>
+                      <a:prstDash val="solid"/>
+                      <a:round/>
+                      <a:headEnd type="none" w="med" len="med"/>
+                      <a:tailEnd type="none" w="med" len="med"/>
+                    </a:lnT>
+                    <a:lnB w="12700" cap="flat" cmpd="sng" algn="ctr">
+                      <a:solidFill>
+                        <a:schemeClr val="tx1"/>
+                      </a:solidFill>
+                      <a:prstDash val="solid"/>
+                      <a:round/>
+                      <a:headEnd type="none" w="med" len="med"/>
+                      <a:tailEnd type="none" w="med" len="med"/>
+                    </a:lnB>
+                  </a:tcPr>
                 </a:tc>
                 <a:extLst>
                   <a:ext uri="{0D108BD9-81ED-4DB2-BD59-A6C34878D82A}">
@@ -5195,14 +6389,53 @@
                           <a:solidFill>
                             <a:srgbClr val="141414"/>
                           </a:solidFill>
-                          <a:latin typeface="VTB Group UI Semi Bold"/>
+                          <a:latin typeface="VTB Group UI Book" panose="020B0503040504020204" pitchFamily="34" charset="-52"/>
                         </a:rPr>
                         <a:t>Количество одновременных участников</a:t>
                       </a:r>
-                      <a:endParaRPr lang="ru-RU"/>
+                      <a:endParaRPr lang="ru-RU">
+                        <a:latin typeface="VTB Group UI Book" panose="020B0503040504020204" pitchFamily="34" charset="-52"/>
+                      </a:endParaRPr>
                     </a:p>
                   </a:txBody>
-                  <a:tcPr marL="182880" marR="182880" anchor="ctr"/>
+                  <a:tcPr marL="182880" marR="182880" anchor="ctr">
+                    <a:lnL w="12700" cap="flat" cmpd="sng" algn="ctr">
+                      <a:solidFill>
+                        <a:schemeClr val="tx1"/>
+                      </a:solidFill>
+                      <a:prstDash val="solid"/>
+                      <a:round/>
+                      <a:headEnd type="none" w="med" len="med"/>
+                      <a:tailEnd type="none" w="med" len="med"/>
+                    </a:lnL>
+                    <a:lnR w="12700" cap="flat" cmpd="sng" algn="ctr">
+                      <a:solidFill>
+                        <a:schemeClr val="tx1"/>
+                      </a:solidFill>
+                      <a:prstDash val="solid"/>
+                      <a:round/>
+                      <a:headEnd type="none" w="med" len="med"/>
+                      <a:tailEnd type="none" w="med" len="med"/>
+                    </a:lnR>
+                    <a:lnT w="12700" cap="flat" cmpd="sng" algn="ctr">
+                      <a:solidFill>
+                        <a:schemeClr val="tx1"/>
+                      </a:solidFill>
+                      <a:prstDash val="solid"/>
+                      <a:round/>
+                      <a:headEnd type="none" w="med" len="med"/>
+                      <a:tailEnd type="none" w="med" len="med"/>
+                    </a:lnT>
+                    <a:lnB w="12700" cap="flat" cmpd="sng" algn="ctr">
+                      <a:solidFill>
+                        <a:schemeClr val="tx1"/>
+                      </a:solidFill>
+                      <a:prstDash val="solid"/>
+                      <a:round/>
+                      <a:headEnd type="none" w="med" len="med"/>
+                      <a:tailEnd type="none" w="med" len="med"/>
+                    </a:lnB>
+                  </a:tcPr>
                 </a:tc>
                 <a:tc>
                   <a:txBody>
@@ -5215,7 +6448,7 @@
                           <a:solidFill>
                             <a:srgbClr val="141414"/>
                           </a:solidFill>
-                          <a:latin typeface="VTB Group UI Book"/>
+                          <a:latin typeface="VTB Group UI Book" panose="020B0503040504020204" pitchFamily="34" charset="-52"/>
                         </a:rPr>
                         <a:t>Среднее кол-во участников в ВКС</a:t>
                       </a:r>
@@ -5224,7 +6457,7 @@
                           <a:solidFill>
                             <a:srgbClr val="141414"/>
                           </a:solidFill>
-                          <a:latin typeface="VTB Group UI Book"/>
+                          <a:latin typeface="VTB Group UI Book" panose="020B0503040504020204" pitchFamily="34" charset="-52"/>
                         </a:rPr>
                         <a:t>: </a:t>
                       </a:r>
@@ -5236,7 +6469,7 @@
                           <a:highlight>
                             <a:srgbClr val="FFFF00"/>
                           </a:highlight>
-                          <a:latin typeface="VTB Group UI Book"/>
+                          <a:latin typeface="VTB Group UI Book" panose="020B0503040504020204" pitchFamily="34" charset="-52"/>
                         </a:rPr>
                         <a:t>50</a:t>
                       </a:r>
@@ -5245,7 +6478,7 @@
                           <a:solidFill>
                             <a:srgbClr val="141414"/>
                           </a:solidFill>
-                          <a:latin typeface="VTB Group UI Book"/>
+                          <a:latin typeface="VTB Group UI Book" panose="020B0503040504020204" pitchFamily="34" charset="-52"/>
                         </a:rPr>
                         <a:t> </a:t>
                       </a:r>
@@ -5254,14 +6487,53 @@
                           <a:solidFill>
                             <a:srgbClr val="141414"/>
                           </a:solidFill>
-                          <a:latin typeface="VTB Group UI Book"/>
+                          <a:latin typeface="VTB Group UI Book" panose="020B0503040504020204" pitchFamily="34" charset="-52"/>
                         </a:rPr>
                         <a:t>(до 1000 возможно), но присоединение к доске архитектурно нереализуемо такого кол-ва. Одновременное удержание на доске 25, с деградациями до 50.</a:t>
                       </a:r>
-                      <a:endParaRPr lang="ru-RU"/>
+                      <a:endParaRPr lang="ru-RU">
+                        <a:latin typeface="VTB Group UI Book" panose="020B0503040504020204" pitchFamily="34" charset="-52"/>
+                      </a:endParaRPr>
                     </a:p>
                   </a:txBody>
-                  <a:tcPr marL="182880" marR="182880" anchor="ctr"/>
+                  <a:tcPr marL="182880" marR="182880" anchor="ctr">
+                    <a:lnL w="12700" cap="flat" cmpd="sng" algn="ctr">
+                      <a:solidFill>
+                        <a:schemeClr val="tx1"/>
+                      </a:solidFill>
+                      <a:prstDash val="solid"/>
+                      <a:round/>
+                      <a:headEnd type="none" w="med" len="med"/>
+                      <a:tailEnd type="none" w="med" len="med"/>
+                    </a:lnL>
+                    <a:lnR w="12700" cap="flat" cmpd="sng" algn="ctr">
+                      <a:solidFill>
+                        <a:schemeClr val="tx1"/>
+                      </a:solidFill>
+                      <a:prstDash val="solid"/>
+                      <a:round/>
+                      <a:headEnd type="none" w="med" len="med"/>
+                      <a:tailEnd type="none" w="med" len="med"/>
+                    </a:lnR>
+                    <a:lnT w="12700" cap="flat" cmpd="sng" algn="ctr">
+                      <a:solidFill>
+                        <a:schemeClr val="tx1"/>
+                      </a:solidFill>
+                      <a:prstDash val="solid"/>
+                      <a:round/>
+                      <a:headEnd type="none" w="med" len="med"/>
+                      <a:tailEnd type="none" w="med" len="med"/>
+                    </a:lnT>
+                    <a:lnB w="12700" cap="flat" cmpd="sng" algn="ctr">
+                      <a:solidFill>
+                        <a:schemeClr val="tx1"/>
+                      </a:solidFill>
+                      <a:prstDash val="solid"/>
+                      <a:round/>
+                      <a:headEnd type="none" w="med" len="med"/>
+                      <a:tailEnd type="none" w="med" len="med"/>
+                    </a:lnB>
+                  </a:tcPr>
                 </a:tc>
                 <a:extLst>
                   <a:ext uri="{0D108BD9-81ED-4DB2-BD59-A6C34878D82A}">
@@ -5281,14 +6553,53 @@
                           <a:solidFill>
                             <a:srgbClr val="141414"/>
                           </a:solidFill>
-                          <a:latin typeface="VTB Group UI Semi Bold"/>
+                          <a:latin typeface="VTB Group UI Book" panose="020B0503040504020204" pitchFamily="34" charset="-52"/>
                         </a:rPr>
                         <a:t>Ролевой доступ</a:t>
                       </a:r>
-                      <a:endParaRPr lang="ru-RU"/>
+                      <a:endParaRPr lang="ru-RU">
+                        <a:latin typeface="VTB Group UI Book" panose="020B0503040504020204" pitchFamily="34" charset="-52"/>
+                      </a:endParaRPr>
                     </a:p>
                   </a:txBody>
-                  <a:tcPr marL="182880" marR="182880" anchor="ctr"/>
+                  <a:tcPr marL="182880" marR="182880" anchor="ctr">
+                    <a:lnL w="12700" cap="flat" cmpd="sng" algn="ctr">
+                      <a:solidFill>
+                        <a:schemeClr val="tx1"/>
+                      </a:solidFill>
+                      <a:prstDash val="solid"/>
+                      <a:round/>
+                      <a:headEnd type="none" w="med" len="med"/>
+                      <a:tailEnd type="none" w="med" len="med"/>
+                    </a:lnL>
+                    <a:lnR w="12700" cap="flat" cmpd="sng" algn="ctr">
+                      <a:solidFill>
+                        <a:schemeClr val="tx1"/>
+                      </a:solidFill>
+                      <a:prstDash val="solid"/>
+                      <a:round/>
+                      <a:headEnd type="none" w="med" len="med"/>
+                      <a:tailEnd type="none" w="med" len="med"/>
+                    </a:lnR>
+                    <a:lnT w="12700" cap="flat" cmpd="sng" algn="ctr">
+                      <a:solidFill>
+                        <a:schemeClr val="tx1"/>
+                      </a:solidFill>
+                      <a:prstDash val="solid"/>
+                      <a:round/>
+                      <a:headEnd type="none" w="med" len="med"/>
+                      <a:tailEnd type="none" w="med" len="med"/>
+                    </a:lnT>
+                    <a:lnB w="12700" cap="flat" cmpd="sng" algn="ctr">
+                      <a:solidFill>
+                        <a:schemeClr val="tx1"/>
+                      </a:solidFill>
+                      <a:prstDash val="solid"/>
+                      <a:round/>
+                      <a:headEnd type="none" w="med" len="med"/>
+                      <a:tailEnd type="none" w="med" len="med"/>
+                    </a:lnB>
+                  </a:tcPr>
                 </a:tc>
                 <a:tc>
                   <a:txBody>
@@ -5301,7 +6612,7 @@
                           <a:solidFill>
                             <a:srgbClr val="141414"/>
                           </a:solidFill>
-                          <a:latin typeface="VTB Group UI Book"/>
+                          <a:latin typeface="VTB Group UI Book" panose="020B0503040504020204" pitchFamily="34" charset="-52"/>
                         </a:rPr>
                         <a:t>Роли </a:t>
                       </a:r>
@@ -5310,7 +6621,7 @@
                           <a:solidFill>
                             <a:srgbClr val="141414"/>
                           </a:solidFill>
-                          <a:latin typeface="VTB Group UI Book"/>
+                          <a:latin typeface="VTB Group UI Book" panose="020B0503040504020204" pitchFamily="34" charset="-52"/>
                         </a:rPr>
                         <a:t>«редактор» и «просмотр»</a:t>
                       </a:r>
@@ -5319,14 +6630,53 @@
                           <a:solidFill>
                             <a:srgbClr val="141414"/>
                           </a:solidFill>
-                          <a:latin typeface="VTB Group UI Book"/>
+                          <a:latin typeface="VTB Group UI Book" panose="020B0503040504020204" pitchFamily="34" charset="-52"/>
                         </a:rPr>
                         <a:t>, предоставление доступа к доске не всем пользователям ВКС.</a:t>
                       </a:r>
-                      <a:endParaRPr lang="ru-RU"/>
+                      <a:endParaRPr lang="ru-RU">
+                        <a:latin typeface="VTB Group UI Book" panose="020B0503040504020204" pitchFamily="34" charset="-52"/>
+                      </a:endParaRPr>
                     </a:p>
                   </a:txBody>
-                  <a:tcPr marL="182880" marR="182880" anchor="ctr"/>
+                  <a:tcPr marL="182880" marR="182880" anchor="ctr">
+                    <a:lnL w="12700" cap="flat" cmpd="sng" algn="ctr">
+                      <a:solidFill>
+                        <a:schemeClr val="tx1"/>
+                      </a:solidFill>
+                      <a:prstDash val="solid"/>
+                      <a:round/>
+                      <a:headEnd type="none" w="med" len="med"/>
+                      <a:tailEnd type="none" w="med" len="med"/>
+                    </a:lnL>
+                    <a:lnR w="12700" cap="flat" cmpd="sng" algn="ctr">
+                      <a:solidFill>
+                        <a:schemeClr val="tx1"/>
+                      </a:solidFill>
+                      <a:prstDash val="solid"/>
+                      <a:round/>
+                      <a:headEnd type="none" w="med" len="med"/>
+                      <a:tailEnd type="none" w="med" len="med"/>
+                    </a:lnR>
+                    <a:lnT w="12700" cap="flat" cmpd="sng" algn="ctr">
+                      <a:solidFill>
+                        <a:schemeClr val="tx1"/>
+                      </a:solidFill>
+                      <a:prstDash val="solid"/>
+                      <a:round/>
+                      <a:headEnd type="none" w="med" len="med"/>
+                      <a:tailEnd type="none" w="med" len="med"/>
+                    </a:lnT>
+                    <a:lnB w="12700" cap="flat" cmpd="sng" algn="ctr">
+                      <a:solidFill>
+                        <a:schemeClr val="tx1"/>
+                      </a:solidFill>
+                      <a:prstDash val="solid"/>
+                      <a:round/>
+                      <a:headEnd type="none" w="med" len="med"/>
+                      <a:tailEnd type="none" w="med" len="med"/>
+                    </a:lnB>
+                  </a:tcPr>
                 </a:tc>
                 <a:extLst>
                   <a:ext uri="{0D108BD9-81ED-4DB2-BD59-A6C34878D82A}">
@@ -5346,14 +6696,53 @@
                           <a:solidFill>
                             <a:srgbClr val="141414"/>
                           </a:solidFill>
-                          <a:latin typeface="VTB Group UI Semi Bold"/>
+                          <a:latin typeface="VTB Group UI Book" panose="020B0503040504020204" pitchFamily="34" charset="-52"/>
                         </a:rPr>
                         <a:t>Надёжность</a:t>
                       </a:r>
-                      <a:endParaRPr lang="ru-RU"/>
+                      <a:endParaRPr lang="ru-RU">
+                        <a:latin typeface="VTB Group UI Book" panose="020B0503040504020204" pitchFamily="34" charset="-52"/>
+                      </a:endParaRPr>
                     </a:p>
                   </a:txBody>
-                  <a:tcPr marL="182880" marR="182880" anchor="ctr"/>
+                  <a:tcPr marL="182880" marR="182880" anchor="ctr">
+                    <a:lnL w="12700" cap="flat" cmpd="sng" algn="ctr">
+                      <a:solidFill>
+                        <a:schemeClr val="tx1"/>
+                      </a:solidFill>
+                      <a:prstDash val="solid"/>
+                      <a:round/>
+                      <a:headEnd type="none" w="med" len="med"/>
+                      <a:tailEnd type="none" w="med" len="med"/>
+                    </a:lnL>
+                    <a:lnR w="12700" cap="flat" cmpd="sng" algn="ctr">
+                      <a:solidFill>
+                        <a:schemeClr val="tx1"/>
+                      </a:solidFill>
+                      <a:prstDash val="solid"/>
+                      <a:round/>
+                      <a:headEnd type="none" w="med" len="med"/>
+                      <a:tailEnd type="none" w="med" len="med"/>
+                    </a:lnR>
+                    <a:lnT w="12700" cap="flat" cmpd="sng" algn="ctr">
+                      <a:solidFill>
+                        <a:schemeClr val="tx1"/>
+                      </a:solidFill>
+                      <a:prstDash val="solid"/>
+                      <a:round/>
+                      <a:headEnd type="none" w="med" len="med"/>
+                      <a:tailEnd type="none" w="med" len="med"/>
+                    </a:lnT>
+                    <a:lnB w="12700" cap="flat" cmpd="sng" algn="ctr">
+                      <a:solidFill>
+                        <a:schemeClr val="tx1"/>
+                      </a:solidFill>
+                      <a:prstDash val="solid"/>
+                      <a:round/>
+                      <a:headEnd type="none" w="med" len="med"/>
+                      <a:tailEnd type="none" w="med" len="med"/>
+                    </a:lnB>
+                  </a:tcPr>
                 </a:tc>
                 <a:tc>
                   <a:txBody>
@@ -5366,14 +6755,53 @@
                           <a:solidFill>
                             <a:srgbClr val="141414"/>
                           </a:solidFill>
-                          <a:latin typeface="VTB Group UI Book"/>
+                          <a:latin typeface="VTB Group UI Book" panose="020B0503040504020204" pitchFamily="34" charset="-52"/>
                         </a:rPr>
                         <a:t>Сбой создания доски не блокирует ВКС и оповещение; автосохранение изменений и бэкап при каждой новой ВКС</a:t>
                       </a:r>
-                      <a:endParaRPr lang="ru-RU"/>
+                      <a:endParaRPr lang="ru-RU">
+                        <a:latin typeface="VTB Group UI Book" panose="020B0503040504020204" pitchFamily="34" charset="-52"/>
+                      </a:endParaRPr>
                     </a:p>
                   </a:txBody>
-                  <a:tcPr marL="182880" marR="182880" anchor="ctr"/>
+                  <a:tcPr marL="182880" marR="182880" anchor="ctr">
+                    <a:lnL w="12700" cap="flat" cmpd="sng" algn="ctr">
+                      <a:solidFill>
+                        <a:schemeClr val="tx1"/>
+                      </a:solidFill>
+                      <a:prstDash val="solid"/>
+                      <a:round/>
+                      <a:headEnd type="none" w="med" len="med"/>
+                      <a:tailEnd type="none" w="med" len="med"/>
+                    </a:lnL>
+                    <a:lnR w="12700" cap="flat" cmpd="sng" algn="ctr">
+                      <a:solidFill>
+                        <a:schemeClr val="tx1"/>
+                      </a:solidFill>
+                      <a:prstDash val="solid"/>
+                      <a:round/>
+                      <a:headEnd type="none" w="med" len="med"/>
+                      <a:tailEnd type="none" w="med" len="med"/>
+                    </a:lnR>
+                    <a:lnT w="12700" cap="flat" cmpd="sng" algn="ctr">
+                      <a:solidFill>
+                        <a:schemeClr val="tx1"/>
+                      </a:solidFill>
+                      <a:prstDash val="solid"/>
+                      <a:round/>
+                      <a:headEnd type="none" w="med" len="med"/>
+                      <a:tailEnd type="none" w="med" len="med"/>
+                    </a:lnT>
+                    <a:lnB w="12700" cap="flat" cmpd="sng" algn="ctr">
+                      <a:solidFill>
+                        <a:schemeClr val="tx1"/>
+                      </a:solidFill>
+                      <a:prstDash val="solid"/>
+                      <a:round/>
+                      <a:headEnd type="none" w="med" len="med"/>
+                      <a:tailEnd type="none" w="med" len="med"/>
+                    </a:lnB>
+                  </a:tcPr>
                 </a:tc>
                 <a:extLst>
                   <a:ext uri="{0D108BD9-81ED-4DB2-BD59-A6C34878D82A}">
@@ -5393,14 +6821,53 @@
                           <a:solidFill>
                             <a:srgbClr val="141414"/>
                           </a:solidFill>
-                          <a:latin typeface="VTB Group UI Semi Bold"/>
+                          <a:latin typeface="VTB Group UI Book" panose="020B0503040504020204" pitchFamily="34" charset="-52"/>
                         </a:rPr>
                         <a:t>Совместимость</a:t>
                       </a:r>
-                      <a:endParaRPr lang="ru-RU"/>
+                      <a:endParaRPr lang="ru-RU">
+                        <a:latin typeface="VTB Group UI Book" panose="020B0503040504020204" pitchFamily="34" charset="-52"/>
+                      </a:endParaRPr>
                     </a:p>
                   </a:txBody>
-                  <a:tcPr marL="182880" marR="182880" anchor="ctr"/>
+                  <a:tcPr marL="182880" marR="182880" anchor="ctr">
+                    <a:lnL w="12700" cap="flat" cmpd="sng" algn="ctr">
+                      <a:solidFill>
+                        <a:schemeClr val="tx1"/>
+                      </a:solidFill>
+                      <a:prstDash val="solid"/>
+                      <a:round/>
+                      <a:headEnd type="none" w="med" len="med"/>
+                      <a:tailEnd type="none" w="med" len="med"/>
+                    </a:lnL>
+                    <a:lnR w="12700" cap="flat" cmpd="sng" algn="ctr">
+                      <a:solidFill>
+                        <a:schemeClr val="tx1"/>
+                      </a:solidFill>
+                      <a:prstDash val="solid"/>
+                      <a:round/>
+                      <a:headEnd type="none" w="med" len="med"/>
+                      <a:tailEnd type="none" w="med" len="med"/>
+                    </a:lnR>
+                    <a:lnT w="12700" cap="flat" cmpd="sng" algn="ctr">
+                      <a:solidFill>
+                        <a:schemeClr val="tx1"/>
+                      </a:solidFill>
+                      <a:prstDash val="solid"/>
+                      <a:round/>
+                      <a:headEnd type="none" w="med" len="med"/>
+                      <a:tailEnd type="none" w="med" len="med"/>
+                    </a:lnT>
+                    <a:lnB w="12700" cap="flat" cmpd="sng" algn="ctr">
+                      <a:solidFill>
+                        <a:schemeClr val="tx1"/>
+                      </a:solidFill>
+                      <a:prstDash val="solid"/>
+                      <a:round/>
+                      <a:headEnd type="none" w="med" len="med"/>
+                      <a:tailEnd type="none" w="med" len="med"/>
+                    </a:lnB>
+                  </a:tcPr>
                 </a:tc>
                 <a:tc>
                   <a:txBody>
@@ -5416,7 +6883,44 @@
                       </a:r>
                     </a:p>
                   </a:txBody>
-                  <a:tcPr marL="182880" marR="182880" anchor="ctr"/>
+                  <a:tcPr marL="182880" marR="182880" anchor="ctr">
+                    <a:lnL w="12700" cap="flat" cmpd="sng" algn="ctr">
+                      <a:solidFill>
+                        <a:schemeClr val="tx1"/>
+                      </a:solidFill>
+                      <a:prstDash val="solid"/>
+                      <a:round/>
+                      <a:headEnd type="none" w="med" len="med"/>
+                      <a:tailEnd type="none" w="med" len="med"/>
+                    </a:lnL>
+                    <a:lnR w="12700" cap="flat" cmpd="sng" algn="ctr">
+                      <a:solidFill>
+                        <a:schemeClr val="tx1"/>
+                      </a:solidFill>
+                      <a:prstDash val="solid"/>
+                      <a:round/>
+                      <a:headEnd type="none" w="med" len="med"/>
+                      <a:tailEnd type="none" w="med" len="med"/>
+                    </a:lnR>
+                    <a:lnT w="12700" cap="flat" cmpd="sng" algn="ctr">
+                      <a:solidFill>
+                        <a:schemeClr val="tx1"/>
+                      </a:solidFill>
+                      <a:prstDash val="solid"/>
+                      <a:round/>
+                      <a:headEnd type="none" w="med" len="med"/>
+                      <a:tailEnd type="none" w="med" len="med"/>
+                    </a:lnT>
+                    <a:lnB w="12700" cap="flat" cmpd="sng" algn="ctr">
+                      <a:solidFill>
+                        <a:schemeClr val="tx1"/>
+                      </a:solidFill>
+                      <a:prstDash val="solid"/>
+                      <a:round/>
+                      <a:headEnd type="none" w="med" len="med"/>
+                      <a:tailEnd type="none" w="med" len="med"/>
+                    </a:lnB>
+                  </a:tcPr>
                 </a:tc>
                 <a:extLst>
                   <a:ext uri="{0D108BD9-81ED-4DB2-BD59-A6C34878D82A}">
@@ -5441,7 +6945,7 @@
 </p:sld>
 </file>
 
-<file path=ppt/slides/slide4.xml><?xml version="1.0" encoding="utf-8"?>
+<file path=ppt/slides/slide5.xml><?xml version="1.0" encoding="utf-8"?>
 <p:sld xmlns:a="http://schemas.openxmlformats.org/drawingml/2006/main" xmlns:r="http://schemas.openxmlformats.org/officeDocument/2006/relationships" xmlns:p="http://schemas.openxmlformats.org/presentationml/2006/main">
   <p:cSld name="Slide 5">
     <p:spTree>
@@ -5473,10 +6977,10 @@
           <p:nvPr/>
         </p:nvPicPr>
         <p:blipFill>
-          <a:blip>
+          <a:blip r:embed="rId3">
             <a:extLst>
               <a:ext uri="{96DAC541-7B7A-43D3-8B79-37D633B846F1}">
-                <asvg:svgBlip xmlns:asvg="http://schemas.microsoft.com/office/drawing/2016/SVG/main" r:embed="rId3"/>
+                <asvg:svgBlip xmlns:asvg="http://schemas.microsoft.com/office/drawing/2016/SVG/main" r:embed="rId4"/>
               </a:ext>
             </a:extLst>
           </a:blip>
@@ -5609,10 +7113,10 @@
           <p:nvPr/>
         </p:nvPicPr>
         <p:blipFill>
-          <a:blip>
+          <a:blip r:embed="rId5">
             <a:extLst>
               <a:ext uri="{96DAC541-7B7A-43D3-8B79-37D633B846F1}">
-                <asvg:svgBlip xmlns:asvg="http://schemas.microsoft.com/office/drawing/2016/SVG/main" r:embed="rId4"/>
+                <asvg:svgBlip xmlns:asvg="http://schemas.microsoft.com/office/drawing/2016/SVG/main" r:embed="rId6"/>
               </a:ext>
             </a:extLst>
           </a:blip>
@@ -5913,7 +7417,7 @@
 </p:sld>
 </file>
 
-<file path=ppt/slides/slide5.xml><?xml version="1.0" encoding="utf-8"?>
+<file path=ppt/slides/slide6.xml><?xml version="1.0" encoding="utf-8"?>
 <p:sld xmlns:a="http://schemas.openxmlformats.org/drawingml/2006/main" xmlns:r="http://schemas.openxmlformats.org/officeDocument/2006/relationships" xmlns:p="http://schemas.openxmlformats.org/presentationml/2006/main">
   <p:cSld>
     <p:bg>
@@ -6475,7 +7979,7 @@
 </p:sld>
 </file>
 
-<file path=ppt/slides/slide6.xml><?xml version="1.0" encoding="utf-8"?>
+<file path=ppt/slides/slide7.xml><?xml version="1.0" encoding="utf-8"?>
 <p:sld xmlns:a="http://schemas.openxmlformats.org/drawingml/2006/main" xmlns:r="http://schemas.openxmlformats.org/officeDocument/2006/relationships" xmlns:p="http://schemas.openxmlformats.org/presentationml/2006/main">
   <p:cSld>
     <p:bg>
@@ -7001,7 +8505,7 @@
 </p:sld>
 </file>
 
-<file path=ppt/slides/slide7.xml><?xml version="1.0" encoding="utf-8"?>
+<file path=ppt/slides/slide8.xml><?xml version="1.0" encoding="utf-8"?>
 <p:sld xmlns:a="http://schemas.openxmlformats.org/drawingml/2006/main" xmlns:r="http://schemas.openxmlformats.org/officeDocument/2006/relationships" xmlns:p="http://schemas.openxmlformats.org/presentationml/2006/main">
   <p:cSld>
     <p:bg>
@@ -7403,7 +8907,7 @@
 </p:sld>
 </file>
 
-<file path=ppt/slides/slide8.xml><?xml version="1.0" encoding="utf-8"?>
+<file path=ppt/slides/slide9.xml><?xml version="1.0" encoding="utf-8"?>
 <p:sld xmlns:a="http://schemas.openxmlformats.org/drawingml/2006/main" xmlns:r="http://schemas.openxmlformats.org/officeDocument/2006/relationships" xmlns:p="http://schemas.openxmlformats.org/presentationml/2006/main">
   <p:cSld name="Slide 3">
     <p:spTree>
@@ -7526,159 +9030,6 @@
         </p:txBody>
       </p:sp>
     </p:spTree>
-  </p:cSld>
-  <p:clrMapOvr>
-    <a:masterClrMapping/>
-  </p:clrMapOvr>
-</p:sld>
-</file>
-
-<file path=ppt/slides/slide9.xml><?xml version="1.0" encoding="utf-8"?>
-<p:sld xmlns:a="http://schemas.openxmlformats.org/drawingml/2006/main" xmlns:r="http://schemas.openxmlformats.org/officeDocument/2006/relationships" xmlns:p="http://schemas.openxmlformats.org/presentationml/2006/main">
-  <p:cSld>
-    <p:spTree>
-      <p:nvGrpSpPr>
-        <p:cNvPr id="1" name="">
-          <a:extLst>
-            <a:ext uri="{FF2B5EF4-FFF2-40B4-BE49-F238E27FC236}">
-              <a16:creationId xmlns:a16="http://schemas.microsoft.com/office/drawing/2014/main" id="{69B229D1-6730-6FED-67C7-A311CE6A3375}"/>
-            </a:ext>
-          </a:extLst>
-        </p:cNvPr>
-        <p:cNvGrpSpPr/>
-        <p:nvPr/>
-      </p:nvGrpSpPr>
-      <p:grpSpPr>
-        <a:xfrm>
-          <a:off x="0" y="0"/>
-          <a:ext cx="0" cy="0"/>
-          <a:chOff x="0" y="0"/>
-          <a:chExt cx="0" cy="0"/>
-        </a:xfrm>
-      </p:grpSpPr>
-      <p:sp>
-        <p:nvSpPr>
-          <p:cNvPr id="3" name="Text 1">
-            <a:extLst>
-              <a:ext uri="{FF2B5EF4-FFF2-40B4-BE49-F238E27FC236}">
-                <a16:creationId xmlns:a16="http://schemas.microsoft.com/office/drawing/2014/main" id="{BB7CAC6B-C46B-89C4-2765-FA4CB113F8FB}"/>
-              </a:ext>
-            </a:extLst>
-          </p:cNvPr>
-          <p:cNvSpPr txBox="1"/>
-          <p:nvPr/>
-        </p:nvSpPr>
-        <p:spPr>
-          <a:xfrm>
-            <a:off x="655320" y="274320"/>
-            <a:ext cx="10881360" cy="822960"/>
-          </a:xfrm>
-          <a:prstGeom prst="rect">
-            <a:avLst/>
-          </a:prstGeom>
-          <a:noFill/>
-          <a:ln/>
-        </p:spPr>
-        <p:txBody>
-          <a:bodyPr wrap="square" lIns="0" tIns="0" rIns="0" bIns="0" rtlCol="0" anchor="t"/>
-          <a:lstStyle/>
-          <a:p>
-            <a:pPr marL="0" indent="0">
-              <a:buNone/>
-            </a:pPr>
-            <a:endParaRPr lang="en-US" sz="3400" dirty="0"/>
-          </a:p>
-        </p:txBody>
-      </p:sp>
-      <p:pic>
-        <p:nvPicPr>
-          <p:cNvPr id="8" name="Image 1" descr="/tmp/claude-0/-home-claude/3e2c67bf-185e-57a7-b169-f73d7abaeeba/scratchpad/flow/deck2/miro.png">
-            <a:extLst>
-              <a:ext uri="{FF2B5EF4-FFF2-40B4-BE49-F238E27FC236}">
-                <a16:creationId xmlns:a16="http://schemas.microsoft.com/office/drawing/2014/main" id="{A7FA4C60-B0FB-D700-2FE1-F17BE6B7BFE4}"/>
-              </a:ext>
-            </a:extLst>
-          </p:cNvPr>
-          <p:cNvPicPr>
-            <a:picLocks noChangeAspect="1"/>
-          </p:cNvPicPr>
-          <p:nvPr/>
-        </p:nvPicPr>
-        <p:blipFill>
-          <a:blip r:embed="rId3"/>
-          <a:stretch>
-            <a:fillRect/>
-          </a:stretch>
-        </p:blipFill>
-        <p:spPr>
-          <a:xfrm>
-            <a:off x="0" y="0"/>
-            <a:ext cx="12220774" cy="5582093"/>
-          </a:xfrm>
-          <a:prstGeom prst="rect">
-            <a:avLst/>
-          </a:prstGeom>
-        </p:spPr>
-      </p:pic>
-      <p:sp>
-        <p:nvSpPr>
-          <p:cNvPr id="7" name="TextBox 6">
-            <a:extLst>
-              <a:ext uri="{FF2B5EF4-FFF2-40B4-BE49-F238E27FC236}">
-                <a16:creationId xmlns:a16="http://schemas.microsoft.com/office/drawing/2014/main" id="{EC506A6A-4E49-1190-C714-766A15A6D0F3}"/>
-              </a:ext>
-            </a:extLst>
-          </p:cNvPr>
-          <p:cNvSpPr txBox="1"/>
-          <p:nvPr/>
-        </p:nvSpPr>
-        <p:spPr>
-          <a:xfrm>
-            <a:off x="1" y="5529559"/>
-            <a:ext cx="12191999" cy="1323439"/>
-          </a:xfrm>
-          <a:prstGeom prst="rect">
-            <a:avLst/>
-          </a:prstGeom>
-          <a:noFill/>
-        </p:spPr>
-        <p:txBody>
-          <a:bodyPr wrap="square">
-            <a:spAutoFit/>
-          </a:bodyPr>
-          <a:lstStyle/>
-          <a:p>
-            <a:pPr marL="0" indent="0" algn="ctr">
-              <a:buNone/>
-            </a:pPr>
-            <a:r>
-              <a:rPr lang="ru-RU" sz="8000">
-                <a:solidFill>
-                  <a:srgbClr val="0B1733"/>
-                </a:solidFill>
-                <a:latin typeface="VTB Group UI Semi Bold" pitchFamily="34" charset="0"/>
-              </a:rPr>
-              <a:t>Аналог</a:t>
-            </a:r>
-            <a:r>
-              <a:rPr lang="en-US" sz="8000">
-                <a:solidFill>
-                  <a:srgbClr val="0B1733"/>
-                </a:solidFill>
-                <a:latin typeface="VTB Group UI Semi Bold" pitchFamily="34" charset="0"/>
-              </a:rPr>
-              <a:t>#2 Miro</a:t>
-            </a:r>
-            <a:endParaRPr lang="en-US" sz="8000" dirty="0"/>
-          </a:p>
-        </p:txBody>
-      </p:sp>
-    </p:spTree>
-    <p:extLst>
-      <p:ext uri="{BB962C8B-B14F-4D97-AF65-F5344CB8AC3E}">
-        <p14:creationId xmlns:p14="http://schemas.microsoft.com/office/powerpoint/2010/main" val="1904169749"/>
-      </p:ext>
-    </p:extLst>
   </p:cSld>
   <p:clrMapOvr>
     <a:masterClrMapping/>
